--- a/04_alkalom/Prezentacio/4_alkalom_prezentacio.pptx
+++ b/04_alkalom/Prezentacio/4_alkalom_prezentacio.pptx
@@ -4,6 +4,9 @@
   <p:sldMasterIdLst>
     <p:sldMasterId id="2147483648" r:id="rId1"/>
   </p:sldMasterIdLst>
+  <p:notesMasterIdLst>
+    <p:notesMasterId r:id="rId15"/>
+  </p:notesMasterIdLst>
   <p:sldIdLst>
     <p:sldId id="256" r:id="rId2"/>
     <p:sldId id="257" r:id="rId3"/>
@@ -19,10 +22,7 @@
     <p:sldId id="267" r:id="rId13"/>
     <p:sldId id="268" r:id="rId14"/>
   </p:sldIdLst>
-  <p:notesMasterIdLst>
-    <p:notesMasterId r:id="rId15"/>
-  </p:notesMasterIdLst>
-  <p:sldSz cx="9144000" cy="5143500"/>
+  <p:sldSz cx="9144000" cy="5143500" type="screen16x9"/>
   <p:notesSz cx="5143500" cy="9144000"/>
   <p:defaultTextStyle>
     <a:lvl1pPr marL="0" algn="l" defTabSz="914400" rtl="0" eaLnBrk="1" latinLnBrk="0" hangingPunct="1">
@@ -116,13 +116,20 @@
       </a:defRPr>
     </a:lvl9pPr>
   </p:defaultTextStyle>
+  <p:extLst>
+    <p:ext uri="{EFAFB233-063F-42B5-8137-9DF3F51BA10A}">
+      <p15:sldGuideLst xmlns:p15="http://schemas.microsoft.com/office/powerpoint/2012/main"/>
+    </p:ext>
+  </p:extLst>
 </p:presentation>
 </file>
 
 <file path=ppt/charts/chart1.xml><?xml version="1.0" encoding="utf-8"?>
-<c:chartSpace xmlns:c="http://schemas.openxmlformats.org/drawingml/2006/chart" xmlns:a="http://schemas.openxmlformats.org/drawingml/2006/main" xmlns:r="http://schemas.openxmlformats.org/officeDocument/2006/relationships">
+<c:chartSpace xmlns:c="http://schemas.openxmlformats.org/drawingml/2006/chart" xmlns:a="http://schemas.openxmlformats.org/drawingml/2006/main" xmlns:r="http://schemas.openxmlformats.org/officeDocument/2006/relationships" xmlns:c16r2="http://schemas.microsoft.com/office/drawing/2015/06/chart">
   <c:date1904 val="0"/>
+  <c:lang val="hu-HU"/>
   <c:roundedCorners val="1"/>
+  <c:style val="2"/>
   <c:chart>
     <c:title>
       <c:tx>
@@ -139,7 +146,7 @@
               </a:defRPr>
             </a:pPr>
             <a:r>
-              <a:rPr sz="1200" b="0" i="0" u="none" strike="noStrike">
+              <a:rPr lang="hu-HU" sz="1200" b="0" i="0" u="none" strike="noStrike">
                 <a:solidFill>
                   <a:srgbClr val="12343B"/>
                 </a:solidFill>
@@ -183,18 +190,26 @@
           <c:invertIfNegative val="0"/>
           <c:dLbls>
             <c:numFmt formatCode="#,##0" sourceLinked="0"/>
+            <c:spPr>
+              <a:noFill/>
+              <a:ln>
+                <a:noFill/>
+              </a:ln>
+              <a:effectLst/>
+            </c:spPr>
             <c:txPr>
               <a:bodyPr/>
               <a:lstStyle/>
               <a:p>
                 <a:pPr>
-                  <a:defRPr b="0" i="0" strike="noStrike" sz="1100" u="none">
+                  <a:defRPr sz="1100" b="0" i="0" u="none" strike="noStrike">
                     <a:solidFill>
                       <a:srgbClr val="1E2A30"/>
                     </a:solidFill>
                     <a:latin typeface="Arial"/>
                   </a:defRPr>
                 </a:pPr>
+                <a:endParaRPr lang="hu-HU"/>
               </a:p>
             </c:txPr>
             <c:showLegendKey val="0"/>
@@ -204,31 +219,35 @@
             <c:showPercent val="0"/>
             <c:showBubbleSize val="0"/>
             <c:showLeaderLines val="0"/>
+            <c:extLst>
+              <c:ext xmlns:c15="http://schemas.microsoft.com/office/drawing/2012/chart" uri="{CE6537A1-D6FC-4f65-9D91-7224C49458BB}">
+                <c15:layout/>
+                <c15:showLeaderLines val="0"/>
+              </c:ext>
+            </c:extLst>
           </c:dLbls>
           <c:cat>
-            <c:multiLvlStrRef>
+            <c:strRef>
               <c:f>Sheet1!$A$2:$A$6</c:f>
-              <c:multiLvlStrCache>
+              <c:strCache>
                 <c:ptCount val="5"/>
-                <c:lvl>
-                  <c:pt idx="0">
-                    <c:v>Megtalált</c:v>
-                  </c:pt>
-                  <c:pt idx="1">
-                    <c:v>Részben</c:v>
-                  </c:pt>
-                  <c:pt idx="2">
-                    <c:v>Hiányzó</c:v>
-                  </c:pt>
-                  <c:pt idx="3">
-                    <c:v>Többlet</c:v>
-                  </c:pt>
-                  <c:pt idx="4">
-                    <c:v>Más körzetből</c:v>
-                  </c:pt>
-                </c:lvl>
-              </c:multiLvlStrCache>
-            </c:multiLvlStrRef>
+                <c:pt idx="0">
+                  <c:v>Megtalált</c:v>
+                </c:pt>
+                <c:pt idx="1">
+                  <c:v>Részben</c:v>
+                </c:pt>
+                <c:pt idx="2">
+                  <c:v>Hiányzó</c:v>
+                </c:pt>
+                <c:pt idx="3">
+                  <c:v>Többlet</c:v>
+                </c:pt>
+                <c:pt idx="4">
+                  <c:v>Más körzetből</c:v>
+                </c:pt>
+              </c:strCache>
+            </c:strRef>
           </c:cat>
           <c:val>
             <c:numRef>
@@ -254,36 +273,23 @@
               </c:numCache>
             </c:numRef>
           </c:val>
+          <c:extLst>
+            <c:ext xmlns:c16="http://schemas.microsoft.com/office/drawing/2014/chart" uri="{C3380CC4-5D6E-409C-BE32-E72D297353CC}">
+              <c16:uniqueId val="{00000000-DADC-447A-B16E-48D6B1988EE1}"/>
+            </c:ext>
+          </c:extLst>
         </c:ser>
         <c:dLbls>
-          <c:numFmt formatCode="#,##0" sourceLinked="0"/>
-          <c:txPr>
-            <a:bodyPr/>
-            <a:lstStyle/>
-            <a:p>
-              <a:pPr>
-                <a:defRPr b="0" i="0" strike="noStrike" sz="1100" u="none">
-                  <a:solidFill>
-                    <a:srgbClr val="1E2A30"/>
-                  </a:solidFill>
-                  <a:latin typeface="Arial"/>
-                </a:defRPr>
-              </a:pPr>
-            </a:p>
-          </c:txPr>
           <c:showLegendKey val="0"/>
           <c:showVal val="1"/>
           <c:showCatName val="0"/>
           <c:showSerName val="0"/>
           <c:showPercent val="0"/>
           <c:showBubbleSize val="0"/>
-          <c:showLeaderLines val="0"/>
         </c:dLbls>
         <c:gapWidth val="150"/>
-        <c:overlap val="0"/>
         <c:axId val="2094734554"/>
         <c:axId val="2094734552"/>
-        <c:axId val="2094734556"/>
       </c:barChart>
       <c:catAx>
         <c:axId val="2094734554"/>
@@ -317,13 +323,14 @@
                 <a:latin typeface="Calibri"/>
               </a:defRPr>
             </a:pPr>
-            <a:endParaRPr lang="en-US"/>
+            <a:endParaRPr lang="hu-HU"/>
           </a:p>
         </c:txPr>
         <c:crossAx val="2094734552"/>
         <c:crosses val="autoZero"/>
         <c:auto val="1"/>
         <c:lblAlgn val="ctr"/>
+        <c:lblOffset val="100"/>
         <c:noMultiLvlLbl val="1"/>
       </c:catAx>
       <c:valAx>
@@ -332,35 +339,11 @@
           <c:orientation val="minMax"/>
         </c:scaling>
         <c:delete val="1"/>
-        <c:axPos val="b"/>
+        <c:axPos val="t"/>
         <c:numFmt formatCode="General" sourceLinked="0"/>
         <c:majorTickMark val="out"/>
         <c:minorTickMark val="none"/>
         <c:tickLblPos val="low"/>
-        <c:spPr>
-          <a:ln w="12700" cap="flat">
-            <a:solidFill>
-              <a:srgbClr val="888888"/>
-            </a:solidFill>
-            <a:prstDash val="solid"/>
-            <a:round/>
-          </a:ln>
-        </c:spPr>
-        <c:txPr>
-          <a:bodyPr/>
-          <a:lstStyle/>
-          <a:p>
-            <a:pPr>
-              <a:defRPr sz="1200" b="0" i="0" u="none" strike="noStrike">
-                <a:solidFill>
-                  <a:srgbClr val="000000"/>
-                </a:solidFill>
-                <a:latin typeface="Arial"/>
-              </a:defRPr>
-            </a:pPr>
-            <a:endParaRPr lang="en-US"/>
-          </a:p>
-        </c:txPr>
         <c:crossAx val="2094734554"/>
         <c:crosses val="autoZero"/>
         <c:crossBetween val="between"/>
@@ -375,6 +358,7 @@
     </c:plotArea>
     <c:plotVisOnly val="1"/>
     <c:dispBlanksAs val="span"/>
+    <c:showDLblsOverMax val="1"/>
   </c:chart>
   <c:spPr>
     <a:noFill/>
@@ -411,234 +395,10 @@
           <a:chExt cx="0" cy="0"/>
         </a:xfrm>
       </p:grpSpPr>
-      <p:sp>
-        <p:nvSpPr>
-          <p:cNvPr id="2" name="Header Placeholder 1"/>
-          <p:cNvSpPr>
-            <a:spLocks noGrp="1"/>
-          </p:cNvSpPr>
-          <p:nvPr>
-            <p:ph type="hdr" sz="quarter"/>
-          </p:nvPr>
-        </p:nvSpPr>
-        <p:spPr>
-          <a:xfrm>
-            <a:off x="0" y="0"/>
-            <a:ext cx="2971800" cy="458788"/>
-          </a:xfrm>
-          <a:prstGeom prst="rect">
-            <a:avLst/>
-          </a:prstGeom>
-        </p:spPr>
-        <p:txBody>
-          <a:bodyPr vert="horz" lIns="91440" tIns="45720" rIns="91440" bIns="45720" rtlCol="0"/>
-          <a:lstStyle>
-            <a:lvl1pPr algn="l">
-              <a:defRPr sz="1200"/>
-            </a:lvl1pPr>
-          </a:lstStyle>
-          <a:p>
-            <a:endParaRPr lang="en-US"/>
-          </a:p>
-        </p:txBody>
-      </p:sp>
-      <p:sp>
-        <p:nvSpPr>
-          <p:cNvPr id="3" name="Date Placeholder 2"/>
-          <p:cNvSpPr>
-            <a:spLocks noGrp="1"/>
-          </p:cNvSpPr>
-          <p:nvPr>
-            <p:ph type="dt" idx="1"/>
-          </p:nvPr>
-        </p:nvSpPr>
-        <p:spPr>
-          <a:xfrm>
-            <a:off x="3884613" y="0"/>
-            <a:ext cx="2971800" cy="458788"/>
-          </a:xfrm>
-          <a:prstGeom prst="rect">
-            <a:avLst/>
-          </a:prstGeom>
-        </p:spPr>
-        <p:txBody>
-          <a:bodyPr vert="horz" lIns="91440" tIns="45720" rIns="91440" bIns="45720" rtlCol="0"/>
-          <a:lstStyle>
-            <a:lvl1pPr algn="r">
-              <a:defRPr sz="1200"/>
-            </a:lvl1pPr>
-          </a:lstStyle>
-          <a:p>
-            <a:fld id="{5282F153-3F37-0F45-9E97-73ACFA13230C}" type="datetimeFigureOut">
-              <a:rPr lang="en-US"/>
-              <a:t>7/23/19</a:t>
-            </a:fld>
-            <a:endParaRPr lang="en-US"/>
-          </a:p>
-        </p:txBody>
-      </p:sp>
-      <p:sp>
-        <p:nvSpPr>
-          <p:cNvPr id="4" name="Slide Image Placeholder 3"/>
-          <p:cNvSpPr>
-            <a:spLocks noGrp="1" noRot="1" noChangeAspect="1"/>
-          </p:cNvSpPr>
-          <p:nvPr>
-            <p:ph type="sldImg" idx="2"/>
-          </p:nvPr>
-        </p:nvSpPr>
-        <p:spPr>
-          <a:xfrm>
-            <a:off x="685800" y="1143000"/>
-            <a:ext cx="5486400" cy="3086100"/>
-          </a:xfrm>
-          <a:prstGeom prst="rect">
-            <a:avLst/>
-          </a:prstGeom>
-          <a:noFill/>
-          <a:ln w="12700">
-            <a:solidFill>
-              <a:prstClr val="black"/>
-            </a:solidFill>
-          </a:ln>
-        </p:spPr>
-        <p:txBody>
-          <a:bodyPr vert="horz" lIns="91440" tIns="45720" rIns="91440" bIns="45720" rtlCol="0" anchor="ctr"/>
-          <a:lstStyle/>
-          <a:p>
-            <a:endParaRPr lang="en-US"/>
-          </a:p>
-        </p:txBody>
-      </p:sp>
-      <p:sp>
-        <p:nvSpPr>
-          <p:cNvPr id="5" name="Notes Placeholder 4"/>
-          <p:cNvSpPr>
-            <a:spLocks noGrp="1"/>
-          </p:cNvSpPr>
-          <p:nvPr>
-            <p:ph type="body" sz="quarter" idx="3"/>
-          </p:nvPr>
-        </p:nvSpPr>
-        <p:spPr>
-          <a:xfrm>
-            <a:off x="685800" y="4400550"/>
-            <a:ext cx="5486400" cy="3600450"/>
-          </a:xfrm>
-          <a:prstGeom prst="rect">
-            <a:avLst/>
-          </a:prstGeom>
-        </p:spPr>
-        <p:txBody>
-          <a:bodyPr vert="horz" lIns="91440" tIns="45720" rIns="91440" bIns="45720" rtlCol="0"/>
-          <a:lstStyle/>
-          <a:p>
-            <a:pPr lvl="0"/>
-            <a:r>
-              <a:rPr lang="en-US"/>
-              <a:t>Click to edit Master text styles</a:t>
-            </a:r>
-          </a:p>
-          <a:p>
-            <a:pPr lvl="1"/>
-            <a:r>
-              <a:rPr lang="en-US"/>
-              <a:t>Second level</a:t>
-            </a:r>
-          </a:p>
-          <a:p>
-            <a:pPr lvl="2"/>
-            <a:r>
-              <a:rPr lang="en-US"/>
-              <a:t>Third level</a:t>
-            </a:r>
-          </a:p>
-          <a:p>
-            <a:pPr lvl="3"/>
-            <a:r>
-              <a:rPr lang="en-US"/>
-              <a:t>Fourth level</a:t>
-            </a:r>
-          </a:p>
-          <a:p>
-            <a:pPr lvl="4"/>
-            <a:r>
-              <a:rPr lang="en-US"/>
-              <a:t>Fifth level</a:t>
-            </a:r>
-          </a:p>
-        </p:txBody>
-      </p:sp>
-      <p:sp>
-        <p:nvSpPr>
-          <p:cNvPr id="6" name="Footer Placeholder 5"/>
-          <p:cNvSpPr>
-            <a:spLocks noGrp="1"/>
-          </p:cNvSpPr>
-          <p:nvPr>
-            <p:ph type="ftr" sz="quarter" idx="4"/>
-          </p:nvPr>
-        </p:nvSpPr>
-        <p:spPr>
-          <a:xfrm>
-            <a:off x="0" y="8685213"/>
-            <a:ext cx="2971800" cy="458787"/>
-          </a:xfrm>
-          <a:prstGeom prst="rect">
-            <a:avLst/>
-          </a:prstGeom>
-        </p:spPr>
-        <p:txBody>
-          <a:bodyPr vert="horz" lIns="91440" tIns="45720" rIns="91440" bIns="45720" rtlCol="0" anchor="b"/>
-          <a:lstStyle>
-            <a:lvl1pPr algn="l">
-              <a:defRPr sz="1200"/>
-            </a:lvl1pPr>
-          </a:lstStyle>
-          <a:p>
-            <a:endParaRPr lang="en-US"/>
-          </a:p>
-        </p:txBody>
-      </p:sp>
-      <p:sp>
-        <p:nvSpPr>
-          <p:cNvPr id="7" name="Slide Number Placeholder 6"/>
-          <p:cNvSpPr>
-            <a:spLocks noGrp="1"/>
-          </p:cNvSpPr>
-          <p:nvPr>
-            <p:ph type="sldNum" sz="quarter" idx="5"/>
-          </p:nvPr>
-        </p:nvSpPr>
-        <p:spPr>
-          <a:xfrm>
-            <a:off x="3884613" y="8685213"/>
-            <a:ext cx="2971800" cy="458787"/>
-          </a:xfrm>
-          <a:prstGeom prst="rect">
-            <a:avLst/>
-          </a:prstGeom>
-        </p:spPr>
-        <p:txBody>
-          <a:bodyPr vert="horz" lIns="91440" tIns="45720" rIns="91440" bIns="45720" rtlCol="0" anchor="b"/>
-          <a:lstStyle>
-            <a:lvl1pPr algn="r">
-              <a:defRPr sz="1200"/>
-            </a:lvl1pPr>
-          </a:lstStyle>
-          <a:p>
-            <a:fld id="{CE5E9CC1-C706-0F49-92D6-E571CC5EEA8F}" type="slidenum">
-              <a:rPr lang="en-US"/>
-              <a:t>‹#›</a:t>
-            </a:fld>
-            <a:endParaRPr lang="en-US"/>
-          </a:p>
-        </p:txBody>
-      </p:sp>
     </p:spTree>
     <p:extLst>
       <p:ext uri="{BB962C8B-B14F-4D97-AF65-F5344CB8AC3E}">
-        <p14:creationId xmlns:p14="http://schemas.microsoft.com/office/powerpoint/2010/main" val="1024086991"/>
+        <p14:creationId xmlns:p14="http://schemas.microsoft.com/office/powerpoint/2010/main" val="1655231620"/>
       </p:ext>
     </p:extLst>
   </p:cSld>
@@ -786,7 +546,6 @@
               <a:rPr lang="en-US" dirty="0"/>
               <a:t>~20 mp – Bárkányi Máté. Bemutatkozás: Bárkányi Máté, Horváth Máté és Kiss Barnabás; a leltározó és leltárkezelő alkalmazást fejlesztjük. Ma a teljes projektet mutatjuk be az alapoktól, a hangsúly a 4. alkalomra elkészült prototípuson van: szerver, adatbázis és tesztadatok.</a:t>
             </a:r>
-            <a:endParaRPr lang="en-US" dirty="0"/>
           </a:p>
         </p:txBody>
       </p:sp>
@@ -874,7 +633,6 @@
               <a:rPr lang="en-US" dirty="0"/>
               <a:t>~40 mp – Kiss Barnabás. A GitHub Actions minden pushnál és pull requestnél lefordítja a teljes megoldást Windowson (a WPF miatt), és lefuttatja a 34 tesztet. Az adatmodell-tesztek adatbázis nélkül futnak, és azt is ellenőrzik, hogy nem maradt-e ki migráció – ezt szándékos hibával ki is próbáltuk. A valódi SQL Serveren a megszorításokat az ellenőrző szkript igazolja.</a:t>
             </a:r>
-            <a:endParaRPr lang="en-US" dirty="0"/>
           </a:p>
         </p:txBody>
       </p:sp>
@@ -962,7 +720,6 @@
               <a:rPr lang="en-US" dirty="0"/>
               <a:t>~40 mp – Bárkányi Máté. [KITÖLTENDŐ: a drótvázak vagy az első WPF-nézet bemutatása, a stíluskönyvtár választása, és hogy a kliens hogyan hívja a szerver végpontjait a közös Kozos projekten keresztül.]</a:t>
             </a:r>
-            <a:endParaRPr lang="en-US" dirty="0"/>
           </a:p>
         </p:txBody>
       </p:sp>
@@ -1050,7 +807,6 @@
               <a:rPr lang="en-US" dirty="0"/>
               <a:t>~45 mp – Kiss Barnabás. Kiegészítő funkciónak egy zárt kört javasolunk: a rendszer vonalkódcímkét nyomtat a hiányzó címkék helyett, a címke kamerával is beolvasható – így olvasó nélkül is lehet leltározni –, a leltár végén pedig hivatalos PDF-jegyzőkönyv készül. A könyvtárakat is kiválasztottuk. Az adatbázisban már előkészítettük: a beolvasás módjai között ott a kamera.</a:t>
             </a:r>
-            <a:endParaRPr lang="en-US" dirty="0"/>
           </a:p>
         </p:txBody>
       </p:sp>
@@ -1138,7 +894,6 @@
               <a:rPr lang="en-US" dirty="0"/>
               <a:t>~40 mp – mindhárman egy-egy mondatban. Bárkányi Máté: kliens és felhasználói élmény. Horváth Máté: szerver, hitelesítés, API. Kiss Barnabás: adatmodell, adatbázis, tesztadatok, minőség és CI. Az 5. alkalomig: Excel import, import- és törzsadat-végpontok, szerepkör szerinti jogosultság, a WPF kliensben bejelentkezés, eszközlista és import képernyő, valamint a leltározási folyamat terve. Köszönjük, várjuk a kérdéseket.</a:t>
             </a:r>
-            <a:endParaRPr lang="en-US" dirty="0"/>
           </a:p>
         </p:txBody>
       </p:sp>
@@ -1226,7 +981,6 @@
               <a:rPr lang="en-US" dirty="0"/>
               <a:t>~40 mp – Bárkányi Máté. A leltár célja: a nyilvántartásban lévő eszközök fizikailag is megvannak-e. Négy fő nehézség: több kód egy eszközön, mennyiséges tételek, más körzetben előkerülő eszközök, valamint a hely és a korábbi eredmények hiánya. Ezért nem elég egy Excel-tábla.</a:t>
             </a:r>
-            <a:endParaRPr lang="en-US" dirty="0"/>
           </a:p>
         </p:txBody>
       </p:sp>
@@ -1314,7 +1068,6 @@
               <a:rPr lang="en-US" dirty="0"/>
               <a:t>~40 mp – Horváth Máté. Öt meglévő rendszert vizsgáltunk; mindegyikből tanultunk (eseménynapló, időfüggő helyadat, elvárt és megszámolt mennyiség egymás mellett), de egyik sem fedi le a teljes feladatot. Ami nálunk új: egységes folyamat, reprodukálható leltáreredmény a pillanatkép miatt, valósághű azonosítás, a kiegészítők ellenőrzésének követése és a teljes történetiség.</a:t>
             </a:r>
-            <a:endParaRPr lang="en-US" dirty="0"/>
           </a:p>
         </p:txBody>
       </p:sp>
@@ -1402,7 +1155,6 @@
               <a:rPr lang="en-US" dirty="0"/>
               <a:t>~45 mp – Bárkányi Máté. Négy szerepkör a valós leltározási folyamat alapján; a leltározó csak a számára kijelölt körzetekben dolgozhat – ez a jogosultság már az adatbázisban is megvan. Jobb oldalon a leltár életciklusa az importtól a lezárásig és a riportig.</a:t>
             </a:r>
-            <a:endParaRPr lang="en-US" dirty="0"/>
           </a:p>
         </p:txBody>
       </p:sp>
@@ -1490,7 +1242,6 @@
               <a:rPr lang="en-US" dirty="0"/>
               <a:t>~50 mp – Bárkányi Máté. Ez a rendszer szíve. Az olvasó billentyűzetként ír a mezőbe; olvasó nélkül kamerával, beillesztéssel vagy demó móddal is működik. A szerver minősíti a beolvasást – megtalálva, más körzet, ismételt, többlet, ismeretlen –, mindegyik rögzül, javítani csak sztornóval lehet. Az ismételt beolvasás nem növeli a darabszámot. Ezek a szabályok már az adatbázisban is megvannak.</a:t>
             </a:r>
-            <a:endParaRPr lang="en-US" dirty="0"/>
           </a:p>
         </p:txBody>
       </p:sp>
@@ -1578,7 +1329,6 @@
               <a:rPr lang="en-US" dirty="0"/>
               <a:t>~60 mp – Horváth Máté. Három futó komponens: WPF kliens, ASP.NET Core szerver és SQL Server. A kliens HTTPS-en, REST-stílusban, JSON-nal kommunikál, a kéréseket JWT token azonosítja. A szerver rétegzett: vékony controllerek, a logika szolgáltatásokban, az adatelérés EF Core-ral. A közös Kozos projekt a kettő szerződése. Az elv: vékony kliens, okos szerver – ennek okai a dián.</a:t>
             </a:r>
-            <a:endParaRPr lang="en-US" dirty="0"/>
           </a:p>
         </p:txBody>
       </p:sp>
@@ -1666,7 +1416,6 @@
               <a:rPr lang="en-US" dirty="0"/>
               <a:t>~60 mp – Kiss Barnabás. Az adatmodell négy területre bomlik. A legfontosabb elv, hogy az elvárt állomány és a leltáreredmény külön van: a leltár nyitásakor pillanatkép készül, így egy régi leltár akkor is reprodukálható, ha a forrásadatok azóta változtak. A kódok normalizált értéke egyedi, a leolvasás esemény, a hely és a felelős érvényességi időszakkal tárolódik. A szabályokat az adatbázis is kikényszeríti: 21 megszorítás és 6 szűrt index.</a:t>
             </a:r>
-            <a:endParaRPr lang="en-US" dirty="0"/>
           </a:p>
         </p:txBody>
       </p:sp>
@@ -1754,7 +1503,6 @@
               <a:rPr lang="en-US" dirty="0"/>
               <a:t>~60 mp – Horváth Máté. A szerver prototípusa öt végponttal működik. Bejelentkezéskor a szerver ellenőrzi a jelszó hash-ét, és 8 órás tokent ad; minden más végpont csak tokennel érhető el. A hibák egységes, szabványos formátumban jönnek vissza, a titkos beállítások nincsenek a repóban. 13 automatikus teszt fut a valódi HTTP-csővezetéken. Élő demó: Swaggerben bejelentkezés egy demó felhasználóval, majd eszközkeresés.</a:t>
             </a:r>
-            <a:endParaRPr lang="en-US" dirty="0"/>
           </a:p>
         </p:txBody>
       </p:sp>
@@ -1842,7 +1590,6 @@
               <a:rPr lang="en-US" dirty="0"/>
               <a:t>~60 mp – Kiss Barnabás. Az első migráció az adatmodell mind a 23 tábláját létrehozza a kezdeti adatokkal együtt. A demóadatokat egy SQL-szkript tölti be: 240 eszköz 689 kóddal, helyiségek, felelősök, egy lezárt és egy folyamatban lévő leltár. A szkript determinisztikus, minden futtatás ugyanazt adja. Egy ellenőrző szkript 12 szándékosan hibás műveletet próbál ki – az adatbázis mindet a várt módon kezeli. A diagram a lezárt leltár összehasonlítását mutatja: minden kategória előállítható.</a:t>
             </a:r>
-            <a:endParaRPr lang="en-US" dirty="0"/>
           </a:p>
         </p:txBody>
       </p:sp>
@@ -1915,6 +1662,11 @@
 <file path=ppt/slideMasters/slideMaster1.xml><?xml version="1.0" encoding="utf-8"?>
 <p:sldMaster xmlns:a="http://schemas.openxmlformats.org/drawingml/2006/main" xmlns:r="http://schemas.openxmlformats.org/officeDocument/2006/relationships" xmlns:p="http://schemas.openxmlformats.org/presentationml/2006/main">
   <p:cSld>
+    <p:bg>
+      <p:bgRef idx="1001">
+        <a:schemeClr val="bg1"/>
+      </p:bgRef>
+    </p:bg>
     <p:spTree>
       <p:nvGrpSpPr>
         <p:cNvPr id="1" name=""/>
@@ -2197,6 +1949,7 @@
         <a:solidFill>
           <a:srgbClr val="12343B"/>
         </a:solidFill>
+        <a:effectLst/>
       </p:bgPr>
     </p:bg>
     <p:spTree>
@@ -2234,11 +1987,11 @@
           <a:bodyPr wrap="square" lIns="0" tIns="0" rIns="0" bIns="0" rtlCol="0" anchor="t"/>
           <a:lstStyle/>
           <a:p>
-            <a:pPr indent="0" marL="0">
-              <a:buNone/>
-            </a:pPr>
-            <a:r>
-              <a:rPr lang="en-US" sz="1200" b="1" spc="200" kern="0" dirty="0">
+            <a:pPr marL="0" indent="0">
+              <a:buNone/>
+            </a:pPr>
+            <a:r>
+              <a:rPr lang="en-US" sz="1200" b="1" kern="0" spc="200" dirty="0">
                 <a:solidFill>
                   <a:srgbClr val="F2A541"/>
                 </a:solidFill>
@@ -2273,7 +2026,7 @@
           <a:bodyPr wrap="square" lIns="0" tIns="0" rIns="0" bIns="0" rtlCol="0" anchor="ctr"/>
           <a:lstStyle/>
           <a:p>
-            <a:pPr indent="0" marL="0">
+            <a:pPr marL="0" indent="0">
               <a:buNone/>
             </a:pPr>
             <a:r>
@@ -2312,7 +2065,7 @@
           <a:bodyPr wrap="square" lIns="0" tIns="0" rIns="0" bIns="0" rtlCol="0" anchor="t"/>
           <a:lstStyle/>
           <a:p>
-            <a:pPr indent="0" marL="0">
+            <a:pPr marL="0" indent="0">
               <a:buNone/>
             </a:pPr>
             <a:r>
@@ -2351,7 +2104,7 @@
           <a:bodyPr wrap="square" lIns="0" tIns="0" rIns="0" bIns="0" rtlCol="0" anchor="t"/>
           <a:lstStyle/>
           <a:p>
-            <a:pPr indent="0" marL="0">
+            <a:pPr marL="0" indent="0">
               <a:buNone/>
             </a:pPr>
             <a:r>
@@ -2390,7 +2143,7 @@
           <a:bodyPr wrap="square" lIns="0" tIns="0" rIns="0" bIns="0" rtlCol="0" anchor="t"/>
           <a:lstStyle/>
           <a:p>
-            <a:pPr indent="0" marL="0">
+            <a:pPr marL="0" indent="0">
               <a:buNone/>
             </a:pPr>
             <a:r>
@@ -2829,7 +2582,7 @@
           <a:bodyPr wrap="square" lIns="0" tIns="0" rIns="0" bIns="0" rtlCol="0" anchor="t"/>
           <a:lstStyle/>
           <a:p>
-            <a:pPr algn="ctr" indent="0" marL="0">
+            <a:pPr marL="0" indent="0" algn="ctr">
               <a:buNone/>
             </a:pPr>
             <a:r>
@@ -2893,7 +2646,7 @@
           <a:bodyPr wrap="square" lIns="0" tIns="0" rIns="0" bIns="0" rtlCol="0" anchor="t"/>
           <a:lstStyle/>
           <a:p>
-            <a:pPr algn="r" indent="0" marL="0">
+            <a:pPr marL="0" indent="0" algn="r">
               <a:buNone/>
             </a:pPr>
             <a:r>
@@ -2927,6 +2680,7 @@
         <a:solidFill>
           <a:srgbClr val="EEF4F5"/>
         </a:solidFill>
+        <a:effectLst/>
       </p:bgPr>
     </p:bg>
     <p:spTree>
@@ -2964,7 +2718,7 @@
           <a:bodyPr wrap="square" lIns="0" tIns="0" rIns="0" bIns="0" rtlCol="0" anchor="ctr"/>
           <a:lstStyle/>
           <a:p>
-            <a:pPr indent="0" marL="0">
+            <a:pPr marL="0" indent="0">
               <a:buNone/>
             </a:pPr>
             <a:r>
@@ -3036,14 +2790,14 @@
       </p:sp>
       <p:pic>
         <p:nvPicPr>
-          <p:cNvPr id="5" name="Image 0" descr="preencoded.png">    </p:cNvPr>
+          <p:cNvPr id="5" name="Image 0" descr="preencoded.png"/>
           <p:cNvPicPr>
             <a:picLocks noChangeAspect="1"/>
           </p:cNvPicPr>
           <p:nvPr/>
         </p:nvPicPr>
         <p:blipFill>
-          <a:blip r:embed="rId1"/>
+          <a:blip r:embed="rId3"/>
           <a:stretch>
             <a:fillRect/>
           </a:stretch>
@@ -3079,7 +2833,7 @@
           <a:bodyPr wrap="square" lIns="0" tIns="0" rIns="0" bIns="0" rtlCol="0" anchor="ctr"/>
           <a:lstStyle/>
           <a:p>
-            <a:pPr algn="ctr" indent="0" marL="0">
+            <a:pPr marL="0" indent="0" algn="ctr">
               <a:buNone/>
             </a:pPr>
             <a:r>
@@ -3175,14 +2929,14 @@
       </p:sp>
       <p:pic>
         <p:nvPicPr>
-          <p:cNvPr id="10" name="Image 1" descr="preencoded.png">    </p:cNvPr>
+          <p:cNvPr id="10" name="Image 1" descr="preencoded.png"/>
           <p:cNvPicPr>
             <a:picLocks noChangeAspect="1"/>
           </p:cNvPicPr>
           <p:nvPr/>
         </p:nvPicPr>
         <p:blipFill>
-          <a:blip r:embed="rId2"/>
+          <a:blip r:embed="rId4"/>
           <a:stretch>
             <a:fillRect/>
           </a:stretch>
@@ -3218,7 +2972,7 @@
           <a:bodyPr wrap="square" lIns="0" tIns="0" rIns="0" bIns="0" rtlCol="0" anchor="ctr"/>
           <a:lstStyle/>
           <a:p>
-            <a:pPr algn="ctr" indent="0" marL="0">
+            <a:pPr marL="0" indent="0" algn="ctr">
               <a:buNone/>
             </a:pPr>
             <a:r>
@@ -3314,14 +3068,14 @@
       </p:sp>
       <p:pic>
         <p:nvPicPr>
-          <p:cNvPr id="15" name="Image 2" descr="preencoded.png">    </p:cNvPr>
+          <p:cNvPr id="15" name="Image 2" descr="preencoded.png"/>
           <p:cNvPicPr>
             <a:picLocks noChangeAspect="1"/>
           </p:cNvPicPr>
           <p:nvPr/>
         </p:nvPicPr>
         <p:blipFill>
-          <a:blip r:embed="rId3"/>
+          <a:blip r:embed="rId5"/>
           <a:stretch>
             <a:fillRect/>
           </a:stretch>
@@ -3357,7 +3111,7 @@
           <a:bodyPr wrap="square" lIns="0" tIns="0" rIns="0" bIns="0" rtlCol="0" anchor="ctr"/>
           <a:lstStyle/>
           <a:p>
-            <a:pPr algn="ctr" indent="0" marL="0">
+            <a:pPr marL="0" indent="0" algn="ctr">
               <a:buNone/>
             </a:pPr>
             <a:r>
@@ -3453,14 +3207,14 @@
       </p:sp>
       <p:pic>
         <p:nvPicPr>
-          <p:cNvPr id="20" name="Image 3" descr="preencoded.png">    </p:cNvPr>
+          <p:cNvPr id="20" name="Image 3" descr="preencoded.png"/>
           <p:cNvPicPr>
             <a:picLocks noChangeAspect="1"/>
           </p:cNvPicPr>
           <p:nvPr/>
         </p:nvPicPr>
         <p:blipFill>
-          <a:blip r:embed="rId4"/>
+          <a:blip r:embed="rId6"/>
           <a:stretch>
             <a:fillRect/>
           </a:stretch>
@@ -3496,7 +3250,7 @@
           <a:bodyPr wrap="square" lIns="0" tIns="0" rIns="0" bIns="0" rtlCol="0" anchor="ctr"/>
           <a:lstStyle/>
           <a:p>
-            <a:pPr algn="ctr" indent="0" marL="0">
+            <a:pPr marL="0" indent="0" algn="ctr">
               <a:buNone/>
             </a:pPr>
             <a:r>
@@ -3562,7 +3316,7 @@
           <a:bodyPr wrap="square" lIns="0" tIns="0" rIns="0" bIns="0" rtlCol="0" anchor="ctr"/>
           <a:lstStyle/>
           <a:p>
-            <a:pPr indent="0" marL="0">
+            <a:pPr marL="0" indent="0">
               <a:buNone/>
             </a:pPr>
             <a:r>
@@ -3601,7 +3355,7 @@
           <a:bodyPr wrap="square" lIns="0" tIns="0" rIns="0" bIns="0" rtlCol="0" anchor="ctr"/>
           <a:lstStyle/>
           <a:p>
-            <a:pPr indent="0" marL="0">
+            <a:pPr marL="0" indent="0">
               <a:buNone/>
             </a:pPr>
             <a:r>
@@ -3640,7 +3394,7 @@
           <a:bodyPr wrap="square" lIns="0" tIns="0" rIns="0" bIns="0" rtlCol="0" anchor="t"/>
           <a:lstStyle/>
           <a:p>
-            <a:pPr indent="0" marL="0">
+            <a:pPr marL="0" indent="0">
               <a:buNone/>
             </a:pPr>
             <a:r>
@@ -3706,7 +3460,7 @@
           <a:bodyPr wrap="square" lIns="0" tIns="0" rIns="0" bIns="0" rtlCol="0" anchor="ctr"/>
           <a:lstStyle/>
           <a:p>
-            <a:pPr indent="0" marL="0">
+            <a:pPr marL="0" indent="0">
               <a:buNone/>
             </a:pPr>
             <a:r>
@@ -3745,7 +3499,7 @@
           <a:bodyPr wrap="square" lIns="0" tIns="0" rIns="0" bIns="0" rtlCol="0" anchor="ctr"/>
           <a:lstStyle/>
           <a:p>
-            <a:pPr indent="0" marL="0">
+            <a:pPr marL="0" indent="0">
               <a:buNone/>
             </a:pPr>
             <a:r>
@@ -3784,7 +3538,7 @@
           <a:bodyPr wrap="square" lIns="0" tIns="0" rIns="0" bIns="0" rtlCol="0" anchor="t"/>
           <a:lstStyle/>
           <a:p>
-            <a:pPr indent="0" marL="0">
+            <a:pPr marL="0" indent="0">
               <a:buNone/>
             </a:pPr>
             <a:r>
@@ -3850,7 +3604,7 @@
           <a:bodyPr wrap="square" lIns="0" tIns="0" rIns="0" bIns="0" rtlCol="0" anchor="ctr"/>
           <a:lstStyle/>
           <a:p>
-            <a:pPr indent="0" marL="0">
+            <a:pPr marL="0" indent="0">
               <a:buNone/>
             </a:pPr>
             <a:r>
@@ -3889,7 +3643,7 @@
           <a:bodyPr wrap="square" lIns="0" tIns="0" rIns="0" bIns="0" rtlCol="0" anchor="ctr"/>
           <a:lstStyle/>
           <a:p>
-            <a:pPr indent="0" marL="0">
+            <a:pPr marL="0" indent="0">
               <a:buNone/>
             </a:pPr>
             <a:r>
@@ -3928,7 +3682,7 @@
           <a:bodyPr wrap="square" lIns="0" tIns="0" rIns="0" bIns="0" rtlCol="0" anchor="t"/>
           <a:lstStyle/>
           <a:p>
-            <a:pPr indent="0" marL="0">
+            <a:pPr marL="0" indent="0">
               <a:buNone/>
             </a:pPr>
             <a:r>
@@ -3967,7 +3721,7 @@
           <a:bodyPr wrap="square" lIns="0" tIns="0" rIns="0" bIns="0" rtlCol="0" anchor="t"/>
           <a:lstStyle/>
           <a:p>
-            <a:pPr algn="r" indent="0" marL="0">
+            <a:pPr marL="0" indent="0" algn="r">
               <a:buNone/>
             </a:pPr>
             <a:r>
@@ -4001,6 +3755,7 @@
         <a:solidFill>
           <a:srgbClr val="FFFFFF"/>
         </a:solidFill>
+        <a:effectLst/>
       </p:bgPr>
     </p:bg>
     <p:spTree>
@@ -4038,7 +3793,7 @@
           <a:bodyPr wrap="square" lIns="0" tIns="0" rIns="0" bIns="0" rtlCol="0" anchor="ctr"/>
           <a:lstStyle/>
           <a:p>
-            <a:pPr indent="0" marL="0">
+            <a:pPr marL="0" indent="0">
               <a:buNone/>
             </a:pPr>
             <a:r>
@@ -4077,7 +3832,7 @@
           <a:bodyPr wrap="square" lIns="0" tIns="0" rIns="0" bIns="0" rtlCol="0" anchor="t"/>
           <a:lstStyle/>
           <a:p>
-            <a:pPr indent="0" marL="0">
+            <a:pPr marL="0" indent="0">
               <a:buNone/>
             </a:pPr>
             <a:r>
@@ -4245,111 +4000,6 @@
       </p:sp>
       <p:sp>
         <p:nvSpPr>
-          <p:cNvPr id="5" name="Shape 3"/>
-          <p:cNvSpPr/>
-          <p:nvPr/>
-        </p:nvSpPr>
-        <p:spPr>
-          <a:xfrm>
-            <a:off x="3840480" y="1051560"/>
-            <a:ext cx="4846320" cy="3520440"/>
-          </a:xfrm>
-          <a:prstGeom prst="roundRect">
-            <a:avLst>
-              <a:gd name="adj" fmla="val 2597"/>
-            </a:avLst>
-          </a:prstGeom>
-          <a:solidFill>
-            <a:srgbClr val="EEF4F5"/>
-          </a:solidFill>
-          <a:ln w="19050">
-            <a:solidFill>
-              <a:srgbClr val="5B6B73"/>
-            </a:solidFill>
-            <a:prstDash val="dash"/>
-          </a:ln>
-        </p:spPr>
-      </p:sp>
-      <p:sp>
-        <p:nvSpPr>
-          <p:cNvPr id="6" name="Text 4"/>
-          <p:cNvSpPr txBox="1"/>
-          <p:nvPr/>
-        </p:nvSpPr>
-        <p:spPr>
-          <a:xfrm>
-            <a:off x="4114800" y="2286000"/>
-            <a:ext cx="4297680" cy="548640"/>
-          </a:xfrm>
-          <a:prstGeom prst="rect">
-            <a:avLst/>
-          </a:prstGeom>
-          <a:noFill/>
-          <a:ln/>
-        </p:spPr>
-        <p:txBody>
-          <a:bodyPr wrap="square" lIns="0" tIns="0" rIns="0" bIns="0" rtlCol="0" anchor="ctr"/>
-          <a:lstStyle/>
-          <a:p>
-            <a:pPr algn="ctr" indent="0" marL="0">
-              <a:buNone/>
-            </a:pPr>
-            <a:r>
-              <a:rPr lang="en-US" sz="1500" b="1" dirty="0">
-                <a:solidFill>
-                  <a:srgbClr val="5B6B73"/>
-                </a:solidFill>
-                <a:latin typeface="Calibri" pitchFamily="34" charset="0"/>
-                <a:ea typeface="Calibri" pitchFamily="34" charset="-122"/>
-                <a:cs typeface="Calibri" pitchFamily="34" charset="-120"/>
-              </a:rPr>
-              <a:t>Ide kerül: képernyőterv vagy képernyőkép az első WPF-nézetről</a:t>
-            </a:r>
-            <a:endParaRPr lang="en-US" sz="1500" dirty="0"/>
-          </a:p>
-        </p:txBody>
-      </p:sp>
-      <p:sp>
-        <p:nvSpPr>
-          <p:cNvPr id="7" name="Text 5"/>
-          <p:cNvSpPr txBox="1"/>
-          <p:nvPr/>
-        </p:nvSpPr>
-        <p:spPr>
-          <a:xfrm>
-            <a:off x="4114800" y="2834640"/>
-            <a:ext cx="4297680" cy="365760"/>
-          </a:xfrm>
-          <a:prstGeom prst="rect">
-            <a:avLst/>
-          </a:prstGeom>
-          <a:noFill/>
-          <a:ln/>
-        </p:spPr>
-        <p:txBody>
-          <a:bodyPr wrap="square" lIns="0" tIns="0" rIns="0" bIns="0" rtlCol="0" anchor="t"/>
-          <a:lstStyle/>
-          <a:p>
-            <a:pPr algn="ctr" indent="0" marL="0">
-              <a:buNone/>
-            </a:pPr>
-            <a:r>
-              <a:rPr lang="en-US" sz="1200" i="1" dirty="0">
-                <a:solidFill>
-                  <a:srgbClr val="5B6B73"/>
-                </a:solidFill>
-                <a:latin typeface="Calibri" pitchFamily="34" charset="0"/>
-                <a:ea typeface="Calibri" pitchFamily="34" charset="-122"/>
-                <a:cs typeface="Calibri" pitchFamily="34" charset="-120"/>
-              </a:rPr>
-              <a:t>(kitölti: Bárkányi Máté)</a:t>
-            </a:r>
-            <a:endParaRPr lang="en-US" sz="1200" dirty="0"/>
-          </a:p>
-        </p:txBody>
-      </p:sp>
-      <p:sp>
-        <p:nvSpPr>
           <p:cNvPr id="8" name="Text 6"/>
           <p:cNvSpPr txBox="1"/>
           <p:nvPr/>
@@ -4369,7 +4019,7 @@
           <a:bodyPr wrap="square" lIns="0" tIns="0" rIns="0" bIns="0" rtlCol="0" anchor="t"/>
           <a:lstStyle/>
           <a:p>
-            <a:pPr algn="r" indent="0" marL="0">
+            <a:pPr marL="0" indent="0" algn="r">
               <a:buNone/>
             </a:pPr>
             <a:r>
@@ -4387,6 +4037,46 @@
           </a:p>
         </p:txBody>
       </p:sp>
+      <p:pic>
+        <p:nvPicPr>
+          <p:cNvPr id="11" name="Kép 10"/>
+          <p:cNvPicPr>
+            <a:picLocks noChangeAspect="1"/>
+          </p:cNvPicPr>
+          <p:nvPr/>
+        </p:nvPicPr>
+        <p:blipFill>
+          <a:blip r:embed="rId3">
+            <a:extLst>
+              <a:ext uri="{28A0092B-C50C-407E-A947-70E740481C1C}">
+                <a14:useLocalDpi xmlns:a14="http://schemas.microsoft.com/office/drawing/2010/main" val="0"/>
+              </a:ext>
+            </a:extLst>
+          </a:blip>
+          <a:stretch>
+            <a:fillRect/>
+          </a:stretch>
+        </p:blipFill>
+        <p:spPr>
+          <a:xfrm>
+            <a:off x="2957234" y="868680"/>
+            <a:ext cx="5729566" cy="3269490"/>
+          </a:xfrm>
+          <a:prstGeom prst="rect">
+            <a:avLst/>
+          </a:prstGeom>
+          <a:ln>
+            <a:noFill/>
+          </a:ln>
+          <a:effectLst>
+            <a:outerShdw blurRad="292100" dist="139700" dir="2700000" algn="tl" rotWithShape="0">
+              <a:srgbClr val="333333">
+                <a:alpha val="65000"/>
+              </a:srgbClr>
+            </a:outerShdw>
+          </a:effectLst>
+        </p:spPr>
+      </p:pic>
     </p:spTree>
   </p:cSld>
   <p:clrMapOvr>
@@ -4403,6 +4093,7 @@
         <a:solidFill>
           <a:srgbClr val="FFFFFF"/>
         </a:solidFill>
+        <a:effectLst/>
       </p:bgPr>
     </p:bg>
     <p:spTree>
@@ -4440,7 +4131,7 @@
           <a:bodyPr wrap="square" lIns="0" tIns="0" rIns="0" bIns="0" rtlCol="0" anchor="ctr"/>
           <a:lstStyle/>
           <a:p>
-            <a:pPr indent="0" marL="0">
+            <a:pPr marL="0" indent="0">
               <a:buNone/>
             </a:pPr>
             <a:r>
@@ -4479,7 +4170,7 @@
           <a:bodyPr wrap="square" lIns="0" tIns="0" rIns="0" bIns="0" rtlCol="0" anchor="t"/>
           <a:lstStyle/>
           <a:p>
-            <a:pPr indent="0" marL="0">
+            <a:pPr marL="0" indent="0">
               <a:buNone/>
             </a:pPr>
             <a:r>
@@ -4551,14 +4242,14 @@
       </p:sp>
       <p:pic>
         <p:nvPicPr>
-          <p:cNvPr id="6" name="Image 0" descr="preencoded.png">    </p:cNvPr>
+          <p:cNvPr id="6" name="Image 0" descr="preencoded.png"/>
           <p:cNvPicPr>
             <a:picLocks noChangeAspect="1"/>
           </p:cNvPicPr>
           <p:nvPr/>
         </p:nvPicPr>
         <p:blipFill>
-          <a:blip r:embed="rId1"/>
+          <a:blip r:embed="rId3"/>
           <a:stretch>
             <a:fillRect/>
           </a:stretch>
@@ -4594,7 +4285,7 @@
           <a:bodyPr wrap="square" lIns="0" tIns="0" rIns="0" bIns="0" rtlCol="0" anchor="t"/>
           <a:lstStyle/>
           <a:p>
-            <a:pPr indent="0" marL="0">
+            <a:pPr marL="0" indent="0">
               <a:buNone/>
             </a:pPr>
             <a:r>
@@ -4633,7 +4324,7 @@
           <a:bodyPr wrap="square" lIns="0" tIns="0" rIns="0" bIns="0" rtlCol="0" anchor="t"/>
           <a:lstStyle/>
           <a:p>
-            <a:pPr indent="0" marL="0">
+            <a:pPr marL="0" indent="0">
               <a:buNone/>
             </a:pPr>
             <a:r>
@@ -4672,7 +4363,7 @@
           <a:bodyPr wrap="square" lIns="0" tIns="0" rIns="0" bIns="0" rtlCol="0" anchor="t"/>
           <a:lstStyle/>
           <a:p>
-            <a:pPr indent="0" marL="0">
+            <a:pPr marL="0" indent="0">
               <a:buNone/>
             </a:pPr>
             <a:r>
@@ -4768,14 +4459,14 @@
       </p:sp>
       <p:pic>
         <p:nvPicPr>
-          <p:cNvPr id="13" name="Image 1" descr="preencoded.png">    </p:cNvPr>
+          <p:cNvPr id="13" name="Image 1" descr="preencoded.png"/>
           <p:cNvPicPr>
             <a:picLocks noChangeAspect="1"/>
           </p:cNvPicPr>
           <p:nvPr/>
         </p:nvPicPr>
         <p:blipFill>
-          <a:blip r:embed="rId2"/>
+          <a:blip r:embed="rId4"/>
           <a:stretch>
             <a:fillRect/>
           </a:stretch>
@@ -4811,7 +4502,7 @@
           <a:bodyPr wrap="square" lIns="0" tIns="0" rIns="0" bIns="0" rtlCol="0" anchor="t"/>
           <a:lstStyle/>
           <a:p>
-            <a:pPr indent="0" marL="0">
+            <a:pPr marL="0" indent="0">
               <a:buNone/>
             </a:pPr>
             <a:r>
@@ -4850,7 +4541,7 @@
           <a:bodyPr wrap="square" lIns="0" tIns="0" rIns="0" bIns="0" rtlCol="0" anchor="t"/>
           <a:lstStyle/>
           <a:p>
-            <a:pPr indent="0" marL="0">
+            <a:pPr marL="0" indent="0">
               <a:buNone/>
             </a:pPr>
             <a:r>
@@ -4889,7 +4580,7 @@
           <a:bodyPr wrap="square" lIns="0" tIns="0" rIns="0" bIns="0" rtlCol="0" anchor="t"/>
           <a:lstStyle/>
           <a:p>
-            <a:pPr indent="0" marL="0">
+            <a:pPr marL="0" indent="0">
               <a:buNone/>
             </a:pPr>
             <a:r>
@@ -4985,14 +4676,14 @@
       </p:sp>
       <p:pic>
         <p:nvPicPr>
-          <p:cNvPr id="20" name="Image 2" descr="preencoded.png">    </p:cNvPr>
+          <p:cNvPr id="20" name="Image 2" descr="preencoded.png"/>
           <p:cNvPicPr>
             <a:picLocks noChangeAspect="1"/>
           </p:cNvPicPr>
           <p:nvPr/>
         </p:nvPicPr>
         <p:blipFill>
-          <a:blip r:embed="rId3"/>
+          <a:blip r:embed="rId5"/>
           <a:stretch>
             <a:fillRect/>
           </a:stretch>
@@ -5028,7 +4719,7 @@
           <a:bodyPr wrap="square" lIns="0" tIns="0" rIns="0" bIns="0" rtlCol="0" anchor="t"/>
           <a:lstStyle/>
           <a:p>
-            <a:pPr indent="0" marL="0">
+            <a:pPr marL="0" indent="0">
               <a:buNone/>
             </a:pPr>
             <a:r>
@@ -5067,7 +4758,7 @@
           <a:bodyPr wrap="square" lIns="0" tIns="0" rIns="0" bIns="0" rtlCol="0" anchor="t"/>
           <a:lstStyle/>
           <a:p>
-            <a:pPr indent="0" marL="0">
+            <a:pPr marL="0" indent="0">
               <a:buNone/>
             </a:pPr>
             <a:r>
@@ -5106,7 +4797,7 @@
           <a:bodyPr wrap="square" lIns="0" tIns="0" rIns="0" bIns="0" rtlCol="0" anchor="t"/>
           <a:lstStyle/>
           <a:p>
-            <a:pPr indent="0" marL="0">
+            <a:pPr marL="0" indent="0">
               <a:buNone/>
             </a:pPr>
             <a:r>
@@ -5145,7 +4836,7 @@
           <a:bodyPr wrap="square" lIns="0" tIns="0" rIns="0" bIns="0" rtlCol="0" anchor="t"/>
           <a:lstStyle/>
           <a:p>
-            <a:pPr indent="0" marL="0">
+            <a:pPr marL="0" indent="0">
               <a:buNone/>
             </a:pPr>
             <a:r>
@@ -5184,7 +4875,7 @@
           <a:bodyPr wrap="square" lIns="0" tIns="0" rIns="0" bIns="0" rtlCol="0" anchor="t"/>
           <a:lstStyle/>
           <a:p>
-            <a:pPr algn="r" indent="0" marL="0">
+            <a:pPr marL="0" indent="0" algn="r">
               <a:buNone/>
             </a:pPr>
             <a:r>
@@ -5218,6 +4909,7 @@
         <a:solidFill>
           <a:srgbClr val="12343B"/>
         </a:solidFill>
+        <a:effectLst/>
       </p:bgPr>
     </p:bg>
     <p:spTree>
@@ -5255,7 +4947,7 @@
           <a:bodyPr wrap="square" lIns="0" tIns="0" rIns="0" bIns="0" rtlCol="0" anchor="ctr"/>
           <a:lstStyle/>
           <a:p>
-            <a:pPr indent="0" marL="0">
+            <a:pPr marL="0" indent="0">
               <a:buNone/>
             </a:pPr>
             <a:r>
@@ -5346,7 +5038,7 @@
           <a:bodyPr wrap="square" lIns="0" tIns="0" rIns="0" bIns="0" rtlCol="0" anchor="ctr"/>
           <a:lstStyle/>
           <a:p>
-            <a:pPr algn="ctr" indent="0" marL="0">
+            <a:pPr marL="0" indent="0" algn="ctr">
               <a:buNone/>
             </a:pPr>
             <a:r>
@@ -5385,7 +5077,7 @@
           <a:bodyPr wrap="square" lIns="0" tIns="0" rIns="0" bIns="0" rtlCol="0" anchor="ctr"/>
           <a:lstStyle/>
           <a:p>
-            <a:pPr indent="0" marL="0">
+            <a:pPr marL="0" indent="0">
               <a:buNone/>
             </a:pPr>
             <a:r>
@@ -5424,7 +5116,7 @@
           <a:bodyPr wrap="square" lIns="0" tIns="0" rIns="0" bIns="0" rtlCol="0" anchor="ctr"/>
           <a:lstStyle/>
           <a:p>
-            <a:pPr indent="0" marL="0">
+            <a:pPr marL="0" indent="0">
               <a:buNone/>
             </a:pPr>
             <a:r>
@@ -5515,7 +5207,7 @@
           <a:bodyPr wrap="square" lIns="0" tIns="0" rIns="0" bIns="0" rtlCol="0" anchor="ctr"/>
           <a:lstStyle/>
           <a:p>
-            <a:pPr algn="ctr" indent="0" marL="0">
+            <a:pPr marL="0" indent="0" algn="ctr">
               <a:buNone/>
             </a:pPr>
             <a:r>
@@ -5554,7 +5246,7 @@
           <a:bodyPr wrap="square" lIns="0" tIns="0" rIns="0" bIns="0" rtlCol="0" anchor="ctr"/>
           <a:lstStyle/>
           <a:p>
-            <a:pPr indent="0" marL="0">
+            <a:pPr marL="0" indent="0">
               <a:buNone/>
             </a:pPr>
             <a:r>
@@ -5593,7 +5285,7 @@
           <a:bodyPr wrap="square" lIns="0" tIns="0" rIns="0" bIns="0" rtlCol="0" anchor="ctr"/>
           <a:lstStyle/>
           <a:p>
-            <a:pPr indent="0" marL="0">
+            <a:pPr marL="0" indent="0">
               <a:buNone/>
             </a:pPr>
             <a:r>
@@ -5684,7 +5376,7 @@
           <a:bodyPr wrap="square" lIns="0" tIns="0" rIns="0" bIns="0" rtlCol="0" anchor="ctr"/>
           <a:lstStyle/>
           <a:p>
-            <a:pPr algn="ctr" indent="0" marL="0">
+            <a:pPr marL="0" indent="0" algn="ctr">
               <a:buNone/>
             </a:pPr>
             <a:r>
@@ -5723,7 +5415,7 @@
           <a:bodyPr wrap="square" lIns="0" tIns="0" rIns="0" bIns="0" rtlCol="0" anchor="ctr"/>
           <a:lstStyle/>
           <a:p>
-            <a:pPr indent="0" marL="0">
+            <a:pPr marL="0" indent="0">
               <a:buNone/>
             </a:pPr>
             <a:r>
@@ -5762,7 +5454,7 @@
           <a:bodyPr wrap="square" lIns="0" tIns="0" rIns="0" bIns="0" rtlCol="0" anchor="ctr"/>
           <a:lstStyle/>
           <a:p>
-            <a:pPr indent="0" marL="0">
+            <a:pPr marL="0" indent="0">
               <a:buNone/>
             </a:pPr>
             <a:r>
@@ -5801,7 +5493,7 @@
           <a:bodyPr wrap="square" lIns="0" tIns="0" rIns="0" bIns="0" rtlCol="0" anchor="t"/>
           <a:lstStyle/>
           <a:p>
-            <a:pPr indent="0" marL="0">
+            <a:pPr marL="0" indent="0">
               <a:buNone/>
             </a:pPr>
             <a:r>
@@ -6010,7 +5702,7 @@
           <a:bodyPr wrap="square" lIns="0" tIns="0" rIns="0" bIns="0" rtlCol="0" anchor="t"/>
           <a:lstStyle/>
           <a:p>
-            <a:pPr algn="r" indent="0" marL="0">
+            <a:pPr marL="0" indent="0" algn="r">
               <a:buNone/>
             </a:pPr>
             <a:r>
@@ -6044,6 +5736,7 @@
         <a:solidFill>
           <a:srgbClr val="FFFFFF"/>
         </a:solidFill>
+        <a:effectLst/>
       </p:bgPr>
     </p:bg>
     <p:spTree>
@@ -6081,7 +5774,7 @@
           <a:bodyPr wrap="square" lIns="0" tIns="0" rIns="0" bIns="0" rtlCol="0" anchor="ctr"/>
           <a:lstStyle/>
           <a:p>
-            <a:pPr indent="0" marL="0">
+            <a:pPr marL="0" indent="0">
               <a:buNone/>
             </a:pPr>
             <a:r>
@@ -6120,7 +5813,7 @@
           <a:bodyPr wrap="square" lIns="0" tIns="0" rIns="0" bIns="0" rtlCol="0" anchor="t"/>
           <a:lstStyle/>
           <a:p>
-            <a:pPr indent="0" marL="0">
+            <a:pPr marL="0" indent="0">
               <a:buNone/>
             </a:pPr>
             <a:r>
@@ -6192,14 +5885,14 @@
       </p:sp>
       <p:pic>
         <p:nvPicPr>
-          <p:cNvPr id="6" name="Image 0" descr="preencoded.png">    </p:cNvPr>
+          <p:cNvPr id="6" name="Image 0" descr="preencoded.png"/>
           <p:cNvPicPr>
             <a:picLocks noChangeAspect="1"/>
           </p:cNvPicPr>
           <p:nvPr/>
         </p:nvPicPr>
         <p:blipFill>
-          <a:blip r:embed="rId1"/>
+          <a:blip r:embed="rId3"/>
           <a:stretch>
             <a:fillRect/>
           </a:stretch>
@@ -6235,7 +5928,7 @@
           <a:bodyPr wrap="square" lIns="0" tIns="0" rIns="0" bIns="0" rtlCol="0" anchor="ctr"/>
           <a:lstStyle/>
           <a:p>
-            <a:pPr indent="0" marL="0">
+            <a:pPr marL="0" indent="0">
               <a:buNone/>
             </a:pPr>
             <a:r>
@@ -6274,7 +5967,7 @@
           <a:bodyPr wrap="square" lIns="0" tIns="0" rIns="0" bIns="0" rtlCol="0" anchor="t"/>
           <a:lstStyle/>
           <a:p>
-            <a:pPr indent="0" marL="0">
+            <a:pPr marL="0" indent="0">
               <a:buNone/>
             </a:pPr>
             <a:r>
@@ -6346,14 +6039,14 @@
       </p:sp>
       <p:pic>
         <p:nvPicPr>
-          <p:cNvPr id="11" name="Image 1" descr="preencoded.png">    </p:cNvPr>
+          <p:cNvPr id="11" name="Image 1" descr="preencoded.png"/>
           <p:cNvPicPr>
             <a:picLocks noChangeAspect="1"/>
           </p:cNvPicPr>
           <p:nvPr/>
         </p:nvPicPr>
         <p:blipFill>
-          <a:blip r:embed="rId2"/>
+          <a:blip r:embed="rId4"/>
           <a:stretch>
             <a:fillRect/>
           </a:stretch>
@@ -6389,7 +6082,7 @@
           <a:bodyPr wrap="square" lIns="0" tIns="0" rIns="0" bIns="0" rtlCol="0" anchor="ctr"/>
           <a:lstStyle/>
           <a:p>
-            <a:pPr indent="0" marL="0">
+            <a:pPr marL="0" indent="0">
               <a:buNone/>
             </a:pPr>
             <a:r>
@@ -6428,7 +6121,7 @@
           <a:bodyPr wrap="square" lIns="0" tIns="0" rIns="0" bIns="0" rtlCol="0" anchor="t"/>
           <a:lstStyle/>
           <a:p>
-            <a:pPr indent="0" marL="0">
+            <a:pPr marL="0" indent="0">
               <a:buNone/>
             </a:pPr>
             <a:r>
@@ -6500,14 +6193,14 @@
       </p:sp>
       <p:pic>
         <p:nvPicPr>
-          <p:cNvPr id="16" name="Image 2" descr="preencoded.png">    </p:cNvPr>
+          <p:cNvPr id="16" name="Image 2" descr="preencoded.png"/>
           <p:cNvPicPr>
             <a:picLocks noChangeAspect="1"/>
           </p:cNvPicPr>
           <p:nvPr/>
         </p:nvPicPr>
         <p:blipFill>
-          <a:blip r:embed="rId3"/>
+          <a:blip r:embed="rId5"/>
           <a:stretch>
             <a:fillRect/>
           </a:stretch>
@@ -6543,7 +6236,7 @@
           <a:bodyPr wrap="square" lIns="0" tIns="0" rIns="0" bIns="0" rtlCol="0" anchor="ctr"/>
           <a:lstStyle/>
           <a:p>
-            <a:pPr indent="0" marL="0">
+            <a:pPr marL="0" indent="0">
               <a:buNone/>
             </a:pPr>
             <a:r>
@@ -6582,7 +6275,7 @@
           <a:bodyPr wrap="square" lIns="0" tIns="0" rIns="0" bIns="0" rtlCol="0" anchor="t"/>
           <a:lstStyle/>
           <a:p>
-            <a:pPr indent="0" marL="0">
+            <a:pPr marL="0" indent="0">
               <a:buNone/>
             </a:pPr>
             <a:r>
@@ -6654,14 +6347,14 @@
       </p:sp>
       <p:pic>
         <p:nvPicPr>
-          <p:cNvPr id="21" name="Image 3" descr="preencoded.png">    </p:cNvPr>
+          <p:cNvPr id="21" name="Image 3" descr="preencoded.png"/>
           <p:cNvPicPr>
             <a:picLocks noChangeAspect="1"/>
           </p:cNvPicPr>
           <p:nvPr/>
         </p:nvPicPr>
         <p:blipFill>
-          <a:blip r:embed="rId4"/>
+          <a:blip r:embed="rId6"/>
           <a:stretch>
             <a:fillRect/>
           </a:stretch>
@@ -6697,7 +6390,7 @@
           <a:bodyPr wrap="square" lIns="0" tIns="0" rIns="0" bIns="0" rtlCol="0" anchor="ctr"/>
           <a:lstStyle/>
           <a:p>
-            <a:pPr indent="0" marL="0">
+            <a:pPr marL="0" indent="0">
               <a:buNone/>
             </a:pPr>
             <a:r>
@@ -6736,7 +6429,7 @@
           <a:bodyPr wrap="square" lIns="0" tIns="0" rIns="0" bIns="0" rtlCol="0" anchor="t"/>
           <a:lstStyle/>
           <a:p>
-            <a:pPr indent="0" marL="0">
+            <a:pPr marL="0" indent="0">
               <a:buNone/>
             </a:pPr>
             <a:r>
@@ -6775,7 +6468,7 @@
           <a:bodyPr wrap="square" lIns="0" tIns="0" rIns="0" bIns="0" rtlCol="0" anchor="t"/>
           <a:lstStyle/>
           <a:p>
-            <a:pPr algn="r" indent="0" marL="0">
+            <a:pPr marL="0" indent="0" algn="r">
               <a:buNone/>
             </a:pPr>
             <a:r>
@@ -6809,6 +6502,7 @@
         <a:solidFill>
           <a:srgbClr val="FFFFFF"/>
         </a:solidFill>
+        <a:effectLst/>
       </p:bgPr>
     </p:bg>
     <p:spTree>
@@ -6846,7 +6540,7 @@
           <a:bodyPr wrap="square" lIns="0" tIns="0" rIns="0" bIns="0" rtlCol="0" anchor="ctr"/>
           <a:lstStyle/>
           <a:p>
-            <a:pPr indent="0" marL="0">
+            <a:pPr marL="0" indent="0">
               <a:buNone/>
             </a:pPr>
             <a:r>
@@ -6891,14 +6585,14 @@
       </p:sp>
       <p:pic>
         <p:nvPicPr>
-          <p:cNvPr id="4" name="Image 0" descr="preencoded.png">    </p:cNvPr>
+          <p:cNvPr id="4" name="Image 0" descr="preencoded.png"/>
           <p:cNvPicPr>
             <a:picLocks noChangeAspect="1"/>
           </p:cNvPicPr>
           <p:nvPr/>
         </p:nvPicPr>
         <p:blipFill>
-          <a:blip r:embed="rId1"/>
+          <a:blip r:embed="rId3"/>
           <a:stretch>
             <a:fillRect/>
           </a:stretch>
@@ -6934,7 +6628,7 @@
           <a:bodyPr wrap="square" lIns="0" tIns="0" rIns="0" bIns="0" rtlCol="0" anchor="t"/>
           <a:lstStyle/>
           <a:p>
-            <a:pPr indent="0" marL="0">
+            <a:pPr marL="0" indent="0">
               <a:buNone/>
             </a:pPr>
             <a:r>
@@ -6973,7 +6667,7 @@
           <a:bodyPr wrap="square" lIns="0" tIns="0" rIns="0" bIns="0" rtlCol="0" anchor="t"/>
           <a:lstStyle/>
           <a:p>
-            <a:pPr indent="0" marL="0">
+            <a:pPr marL="0" indent="0">
               <a:buNone/>
             </a:pPr>
             <a:r>
@@ -7018,14 +6712,14 @@
       </p:sp>
       <p:pic>
         <p:nvPicPr>
-          <p:cNvPr id="8" name="Image 1" descr="preencoded.png">    </p:cNvPr>
+          <p:cNvPr id="8" name="Image 1" descr="preencoded.png"/>
           <p:cNvPicPr>
             <a:picLocks noChangeAspect="1"/>
           </p:cNvPicPr>
           <p:nvPr/>
         </p:nvPicPr>
         <p:blipFill>
-          <a:blip r:embed="rId2"/>
+          <a:blip r:embed="rId4"/>
           <a:stretch>
             <a:fillRect/>
           </a:stretch>
@@ -7061,7 +6755,7 @@
           <a:bodyPr wrap="square" lIns="0" tIns="0" rIns="0" bIns="0" rtlCol="0" anchor="t"/>
           <a:lstStyle/>
           <a:p>
-            <a:pPr indent="0" marL="0">
+            <a:pPr marL="0" indent="0">
               <a:buNone/>
             </a:pPr>
             <a:r>
@@ -7100,7 +6794,7 @@
           <a:bodyPr wrap="square" lIns="0" tIns="0" rIns="0" bIns="0" rtlCol="0" anchor="t"/>
           <a:lstStyle/>
           <a:p>
-            <a:pPr indent="0" marL="0">
+            <a:pPr marL="0" indent="0">
               <a:buNone/>
             </a:pPr>
             <a:r>
@@ -7145,14 +6839,14 @@
       </p:sp>
       <p:pic>
         <p:nvPicPr>
-          <p:cNvPr id="12" name="Image 2" descr="preencoded.png">    </p:cNvPr>
+          <p:cNvPr id="12" name="Image 2" descr="preencoded.png"/>
           <p:cNvPicPr>
             <a:picLocks noChangeAspect="1"/>
           </p:cNvPicPr>
           <p:nvPr/>
         </p:nvPicPr>
         <p:blipFill>
-          <a:blip r:embed="rId3"/>
+          <a:blip r:embed="rId5"/>
           <a:stretch>
             <a:fillRect/>
           </a:stretch>
@@ -7188,7 +6882,7 @@
           <a:bodyPr wrap="square" lIns="0" tIns="0" rIns="0" bIns="0" rtlCol="0" anchor="t"/>
           <a:lstStyle/>
           <a:p>
-            <a:pPr indent="0" marL="0">
+            <a:pPr marL="0" indent="0">
               <a:buNone/>
             </a:pPr>
             <a:r>
@@ -7227,7 +6921,7 @@
           <a:bodyPr wrap="square" lIns="0" tIns="0" rIns="0" bIns="0" rtlCol="0" anchor="t"/>
           <a:lstStyle/>
           <a:p>
-            <a:pPr indent="0" marL="0">
+            <a:pPr marL="0" indent="0">
               <a:buNone/>
             </a:pPr>
             <a:r>
@@ -7272,14 +6966,14 @@
       </p:sp>
       <p:pic>
         <p:nvPicPr>
-          <p:cNvPr id="16" name="Image 3" descr="preencoded.png">    </p:cNvPr>
+          <p:cNvPr id="16" name="Image 3" descr="preencoded.png"/>
           <p:cNvPicPr>
             <a:picLocks noChangeAspect="1"/>
           </p:cNvPicPr>
           <p:nvPr/>
         </p:nvPicPr>
         <p:blipFill>
-          <a:blip r:embed="rId4"/>
+          <a:blip r:embed="rId6"/>
           <a:stretch>
             <a:fillRect/>
           </a:stretch>
@@ -7315,7 +7009,7 @@
           <a:bodyPr wrap="square" lIns="0" tIns="0" rIns="0" bIns="0" rtlCol="0" anchor="t"/>
           <a:lstStyle/>
           <a:p>
-            <a:pPr indent="0" marL="0">
+            <a:pPr marL="0" indent="0">
               <a:buNone/>
             </a:pPr>
             <a:r>
@@ -7354,7 +7048,7 @@
           <a:bodyPr wrap="square" lIns="0" tIns="0" rIns="0" bIns="0" rtlCol="0" anchor="t"/>
           <a:lstStyle/>
           <a:p>
-            <a:pPr indent="0" marL="0">
+            <a:pPr marL="0" indent="0">
               <a:buNone/>
             </a:pPr>
             <a:r>
@@ -7399,14 +7093,14 @@
       </p:sp>
       <p:pic>
         <p:nvPicPr>
-          <p:cNvPr id="20" name="Image 4" descr="preencoded.png">    </p:cNvPr>
+          <p:cNvPr id="20" name="Image 4" descr="preencoded.png"/>
           <p:cNvPicPr>
             <a:picLocks noChangeAspect="1"/>
           </p:cNvPicPr>
           <p:nvPr/>
         </p:nvPicPr>
         <p:blipFill>
-          <a:blip r:embed="rId5"/>
+          <a:blip r:embed="rId7"/>
           <a:stretch>
             <a:fillRect/>
           </a:stretch>
@@ -7442,7 +7136,7 @@
           <a:bodyPr wrap="square" lIns="0" tIns="0" rIns="0" bIns="0" rtlCol="0" anchor="t"/>
           <a:lstStyle/>
           <a:p>
-            <a:pPr indent="0" marL="0">
+            <a:pPr marL="0" indent="0">
               <a:buNone/>
             </a:pPr>
             <a:r>
@@ -7481,7 +7175,7 @@
           <a:bodyPr wrap="square" lIns="0" tIns="0" rIns="0" bIns="0" rtlCol="0" anchor="t"/>
           <a:lstStyle/>
           <a:p>
-            <a:pPr indent="0" marL="0">
+            <a:pPr marL="0" indent="0">
               <a:buNone/>
             </a:pPr>
             <a:r>
@@ -7547,7 +7241,7 @@
           <a:bodyPr wrap="square" lIns="0" tIns="0" rIns="0" bIns="0" rtlCol="0" anchor="t"/>
           <a:lstStyle/>
           <a:p>
-            <a:pPr indent="0" marL="0">
+            <a:pPr marL="0" indent="0">
               <a:buNone/>
             </a:pPr>
             <a:r>
@@ -7586,7 +7280,7 @@
           <a:bodyPr wrap="square" lIns="0" tIns="0" rIns="0" bIns="0" rtlCol="0" anchor="t"/>
           <a:lstStyle/>
           <a:p>
-            <a:pPr indent="0" marL="0">
+            <a:pPr marL="0" indent="0">
               <a:buNone/>
             </a:pPr>
             <a:r>
@@ -7625,7 +7319,7 @@
           <a:bodyPr wrap="square" lIns="0" tIns="0" rIns="0" bIns="0" rtlCol="0" anchor="t"/>
           <a:lstStyle/>
           <a:p>
-            <a:pPr indent="0" marL="0">
+            <a:pPr marL="0" indent="0">
               <a:buNone/>
             </a:pPr>
             <a:r>
@@ -7664,7 +7358,7 @@
           <a:bodyPr wrap="square" lIns="0" tIns="0" rIns="0" bIns="0" rtlCol="0" anchor="t"/>
           <a:lstStyle/>
           <a:p>
-            <a:pPr algn="r" indent="0" marL="0">
+            <a:pPr marL="0" indent="0" algn="r">
               <a:buNone/>
             </a:pPr>
             <a:r>
@@ -7698,6 +7392,7 @@
         <a:solidFill>
           <a:srgbClr val="FFFFFF"/>
         </a:solidFill>
+        <a:effectLst/>
       </p:bgPr>
     </p:bg>
     <p:spTree>
@@ -7735,7 +7430,7 @@
           <a:bodyPr wrap="square" lIns="0" tIns="0" rIns="0" bIns="0" rtlCol="0" anchor="ctr"/>
           <a:lstStyle/>
           <a:p>
-            <a:pPr indent="0" marL="0">
+            <a:pPr marL="0" indent="0">
               <a:buNone/>
             </a:pPr>
             <a:r>
@@ -7780,14 +7475,14 @@
       </p:sp>
       <p:pic>
         <p:nvPicPr>
-          <p:cNvPr id="4" name="Image 0" descr="preencoded.png">    </p:cNvPr>
+          <p:cNvPr id="4" name="Image 0" descr="preencoded.png"/>
           <p:cNvPicPr>
             <a:picLocks noChangeAspect="1"/>
           </p:cNvPicPr>
           <p:nvPr/>
         </p:nvPicPr>
         <p:blipFill>
-          <a:blip r:embed="rId1"/>
+          <a:blip r:embed="rId3"/>
           <a:stretch>
             <a:fillRect/>
           </a:stretch>
@@ -7823,7 +7518,7 @@
           <a:bodyPr wrap="square" lIns="0" tIns="0" rIns="0" bIns="0" rtlCol="0" anchor="t"/>
           <a:lstStyle/>
           <a:p>
-            <a:pPr indent="0" marL="0">
+            <a:pPr marL="0" indent="0">
               <a:buNone/>
             </a:pPr>
             <a:r>
@@ -7862,7 +7557,7 @@
           <a:bodyPr wrap="square" lIns="0" tIns="0" rIns="0" bIns="0" rtlCol="0" anchor="t"/>
           <a:lstStyle/>
           <a:p>
-            <a:pPr indent="0" marL="0">
+            <a:pPr marL="0" indent="0">
               <a:buNone/>
             </a:pPr>
             <a:r>
@@ -7907,14 +7602,14 @@
       </p:sp>
       <p:pic>
         <p:nvPicPr>
-          <p:cNvPr id="8" name="Image 1" descr="preencoded.png">    </p:cNvPr>
+          <p:cNvPr id="8" name="Image 1" descr="preencoded.png"/>
           <p:cNvPicPr>
             <a:picLocks noChangeAspect="1"/>
           </p:cNvPicPr>
           <p:nvPr/>
         </p:nvPicPr>
         <p:blipFill>
-          <a:blip r:embed="rId2"/>
+          <a:blip r:embed="rId4"/>
           <a:stretch>
             <a:fillRect/>
           </a:stretch>
@@ -7950,7 +7645,7 @@
           <a:bodyPr wrap="square" lIns="0" tIns="0" rIns="0" bIns="0" rtlCol="0" anchor="t"/>
           <a:lstStyle/>
           <a:p>
-            <a:pPr indent="0" marL="0">
+            <a:pPr marL="0" indent="0">
               <a:buNone/>
             </a:pPr>
             <a:r>
@@ -7989,7 +7684,7 @@
           <a:bodyPr wrap="square" lIns="0" tIns="0" rIns="0" bIns="0" rtlCol="0" anchor="t"/>
           <a:lstStyle/>
           <a:p>
-            <a:pPr indent="0" marL="0">
+            <a:pPr marL="0" indent="0">
               <a:buNone/>
             </a:pPr>
             <a:r>
@@ -8034,14 +7729,14 @@
       </p:sp>
       <p:pic>
         <p:nvPicPr>
-          <p:cNvPr id="12" name="Image 2" descr="preencoded.png">    </p:cNvPr>
+          <p:cNvPr id="12" name="Image 2" descr="preencoded.png"/>
           <p:cNvPicPr>
             <a:picLocks noChangeAspect="1"/>
           </p:cNvPicPr>
           <p:nvPr/>
         </p:nvPicPr>
         <p:blipFill>
-          <a:blip r:embed="rId3"/>
+          <a:blip r:embed="rId5"/>
           <a:stretch>
             <a:fillRect/>
           </a:stretch>
@@ -8077,7 +7772,7 @@
           <a:bodyPr wrap="square" lIns="0" tIns="0" rIns="0" bIns="0" rtlCol="0" anchor="t"/>
           <a:lstStyle/>
           <a:p>
-            <a:pPr indent="0" marL="0">
+            <a:pPr marL="0" indent="0">
               <a:buNone/>
             </a:pPr>
             <a:r>
@@ -8116,7 +7811,7 @@
           <a:bodyPr wrap="square" lIns="0" tIns="0" rIns="0" bIns="0" rtlCol="0" anchor="t"/>
           <a:lstStyle/>
           <a:p>
-            <a:pPr indent="0" marL="0">
+            <a:pPr marL="0" indent="0">
               <a:buNone/>
             </a:pPr>
             <a:r>
@@ -8161,14 +7856,14 @@
       </p:sp>
       <p:pic>
         <p:nvPicPr>
-          <p:cNvPr id="16" name="Image 3" descr="preencoded.png">    </p:cNvPr>
+          <p:cNvPr id="16" name="Image 3" descr="preencoded.png"/>
           <p:cNvPicPr>
             <a:picLocks noChangeAspect="1"/>
           </p:cNvPicPr>
           <p:nvPr/>
         </p:nvPicPr>
         <p:blipFill>
-          <a:blip r:embed="rId4"/>
+          <a:blip r:embed="rId6"/>
           <a:stretch>
             <a:fillRect/>
           </a:stretch>
@@ -8204,7 +7899,7 @@
           <a:bodyPr wrap="square" lIns="0" tIns="0" rIns="0" bIns="0" rtlCol="0" anchor="t"/>
           <a:lstStyle/>
           <a:p>
-            <a:pPr indent="0" marL="0">
+            <a:pPr marL="0" indent="0">
               <a:buNone/>
             </a:pPr>
             <a:r>
@@ -8243,7 +7938,7 @@
           <a:bodyPr wrap="square" lIns="0" tIns="0" rIns="0" bIns="0" rtlCol="0" anchor="t"/>
           <a:lstStyle/>
           <a:p>
-            <a:pPr indent="0" marL="0">
+            <a:pPr marL="0" indent="0">
               <a:buNone/>
             </a:pPr>
             <a:r>
@@ -8282,7 +7977,7 @@
           <a:bodyPr wrap="square" lIns="0" tIns="0" rIns="0" bIns="0" rtlCol="0" anchor="t"/>
           <a:lstStyle/>
           <a:p>
-            <a:pPr indent="0" marL="0">
+            <a:pPr marL="0" indent="0">
               <a:buNone/>
             </a:pPr>
             <a:r>
@@ -8369,7 +8064,7 @@
           <a:bodyPr wrap="square" lIns="0" tIns="0" rIns="0" bIns="0" rtlCol="0" anchor="ctr"/>
           <a:lstStyle/>
           <a:p>
-            <a:pPr algn="ctr" indent="0" marL="0">
+            <a:pPr marL="0" indent="0" algn="ctr">
               <a:buNone/>
             </a:pPr>
             <a:r>
@@ -8408,7 +8103,7 @@
           <a:bodyPr wrap="square" lIns="0" tIns="0" rIns="0" bIns="0" rtlCol="0" anchor="ctr"/>
           <a:lstStyle/>
           <a:p>
-            <a:pPr indent="0" marL="0">
+            <a:pPr marL="0" indent="0">
               <a:buNone/>
             </a:pPr>
             <a:r>
@@ -8422,9 +8117,6 @@
               </a:rPr>
               <a:t>Excel import</a:t>
             </a:r>
-            <a:pPr indent="0" marL="0">
-              <a:buNone/>
-            </a:pPr>
             <a:r>
               <a:rPr lang="en-US" sz="1200" dirty="0">
                 <a:solidFill>
@@ -8486,7 +8178,7 @@
           <a:bodyPr wrap="square" lIns="0" tIns="0" rIns="0" bIns="0" rtlCol="0" anchor="ctr"/>
           <a:lstStyle/>
           <a:p>
-            <a:pPr algn="ctr" indent="0" marL="0">
+            <a:pPr marL="0" indent="0" algn="ctr">
               <a:buNone/>
             </a:pPr>
             <a:r>
@@ -8525,7 +8217,7 @@
           <a:bodyPr wrap="square" lIns="0" tIns="0" rIns="0" bIns="0" rtlCol="0" anchor="ctr"/>
           <a:lstStyle/>
           <a:p>
-            <a:pPr indent="0" marL="0">
+            <a:pPr marL="0" indent="0">
               <a:buNone/>
             </a:pPr>
             <a:r>
@@ -8539,9 +8231,6 @@
               </a:rPr>
               <a:t>Leltáridőszak nyitása</a:t>
             </a:r>
-            <a:pPr indent="0" marL="0">
-              <a:buNone/>
-            </a:pPr>
             <a:r>
               <a:rPr lang="en-US" sz="1200" dirty="0">
                 <a:solidFill>
@@ -8603,7 +8292,7 @@
           <a:bodyPr wrap="square" lIns="0" tIns="0" rIns="0" bIns="0" rtlCol="0" anchor="ctr"/>
           <a:lstStyle/>
           <a:p>
-            <a:pPr algn="ctr" indent="0" marL="0">
+            <a:pPr marL="0" indent="0" algn="ctr">
               <a:buNone/>
             </a:pPr>
             <a:r>
@@ -8642,7 +8331,7 @@
           <a:bodyPr wrap="square" lIns="0" tIns="0" rIns="0" bIns="0" rtlCol="0" anchor="ctr"/>
           <a:lstStyle/>
           <a:p>
-            <a:pPr indent="0" marL="0">
+            <a:pPr marL="0" indent="0">
               <a:buNone/>
             </a:pPr>
             <a:r>
@@ -8656,9 +8345,6 @@
               </a:rPr>
               <a:t>Beolvasás helyiségenként</a:t>
             </a:r>
-            <a:pPr indent="0" marL="0">
-              <a:buNone/>
-            </a:pPr>
             <a:r>
               <a:rPr lang="en-US" sz="1200" dirty="0">
                 <a:solidFill>
@@ -8720,7 +8406,7 @@
           <a:bodyPr wrap="square" lIns="0" tIns="0" rIns="0" bIns="0" rtlCol="0" anchor="ctr"/>
           <a:lstStyle/>
           <a:p>
-            <a:pPr algn="ctr" indent="0" marL="0">
+            <a:pPr marL="0" indent="0" algn="ctr">
               <a:buNone/>
             </a:pPr>
             <a:r>
@@ -8759,7 +8445,7 @@
           <a:bodyPr wrap="square" lIns="0" tIns="0" rIns="0" bIns="0" rtlCol="0" anchor="ctr"/>
           <a:lstStyle/>
           <a:p>
-            <a:pPr indent="0" marL="0">
+            <a:pPr marL="0" indent="0">
               <a:buNone/>
             </a:pPr>
             <a:r>
@@ -8773,9 +8459,6 @@
               </a:rPr>
               <a:t>Javítás</a:t>
             </a:r>
-            <a:pPr indent="0" marL="0">
-              <a:buNone/>
-            </a:pPr>
             <a:r>
               <a:rPr lang="en-US" sz="1200" dirty="0">
                 <a:solidFill>
@@ -8837,7 +8520,7 @@
           <a:bodyPr wrap="square" lIns="0" tIns="0" rIns="0" bIns="0" rtlCol="0" anchor="ctr"/>
           <a:lstStyle/>
           <a:p>
-            <a:pPr algn="ctr" indent="0" marL="0">
+            <a:pPr marL="0" indent="0" algn="ctr">
               <a:buNone/>
             </a:pPr>
             <a:r>
@@ -8876,7 +8559,7 @@
           <a:bodyPr wrap="square" lIns="0" tIns="0" rIns="0" bIns="0" rtlCol="0" anchor="ctr"/>
           <a:lstStyle/>
           <a:p>
-            <a:pPr indent="0" marL="0">
+            <a:pPr marL="0" indent="0">
               <a:buNone/>
             </a:pPr>
             <a:r>
@@ -8890,9 +8573,6 @@
               </a:rPr>
               <a:t>Összehasonlítás</a:t>
             </a:r>
-            <a:pPr indent="0" marL="0">
-              <a:buNone/>
-            </a:pPr>
             <a:r>
               <a:rPr lang="en-US" sz="1200" dirty="0">
                 <a:solidFill>
@@ -8954,7 +8634,7 @@
           <a:bodyPr wrap="square" lIns="0" tIns="0" rIns="0" bIns="0" rtlCol="0" anchor="ctr"/>
           <a:lstStyle/>
           <a:p>
-            <a:pPr algn="ctr" indent="0" marL="0">
+            <a:pPr marL="0" indent="0" algn="ctr">
               <a:buNone/>
             </a:pPr>
             <a:r>
@@ -8993,7 +8673,7 @@
           <a:bodyPr wrap="square" lIns="0" tIns="0" rIns="0" bIns="0" rtlCol="0" anchor="ctr"/>
           <a:lstStyle/>
           <a:p>
-            <a:pPr indent="0" marL="0">
+            <a:pPr marL="0" indent="0">
               <a:buNone/>
             </a:pPr>
             <a:r>
@@ -9007,9 +8687,6 @@
               </a:rPr>
               <a:t>Lezárás és riport</a:t>
             </a:r>
-            <a:pPr indent="0" marL="0">
-              <a:buNone/>
-            </a:pPr>
             <a:r>
               <a:rPr lang="en-US" sz="1200" dirty="0">
                 <a:solidFill>
@@ -9046,7 +8723,7 @@
           <a:bodyPr wrap="square" lIns="0" tIns="0" rIns="0" bIns="0" rtlCol="0" anchor="t"/>
           <a:lstStyle/>
           <a:p>
-            <a:pPr algn="r" indent="0" marL="0">
+            <a:pPr marL="0" indent="0" algn="r">
               <a:buNone/>
             </a:pPr>
             <a:r>
@@ -9080,6 +8757,7 @@
         <a:solidFill>
           <a:srgbClr val="EEF4F5"/>
         </a:solidFill>
+        <a:effectLst/>
       </p:bgPr>
     </p:bg>
     <p:spTree>
@@ -9117,7 +8795,7 @@
           <a:bodyPr wrap="square" lIns="0" tIns="0" rIns="0" bIns="0" rtlCol="0" anchor="ctr"/>
           <a:lstStyle/>
           <a:p>
-            <a:pPr indent="0" marL="0">
+            <a:pPr marL="0" indent="0">
               <a:buNone/>
             </a:pPr>
             <a:r>
@@ -9156,7 +8834,7 @@
           <a:bodyPr wrap="square" lIns="0" tIns="0" rIns="0" bIns="0" rtlCol="0" anchor="t"/>
           <a:lstStyle/>
           <a:p>
-            <a:pPr indent="0" marL="0">
+            <a:pPr marL="0" indent="0">
               <a:buNone/>
             </a:pPr>
             <a:r>
@@ -9195,7 +8873,7 @@
           <a:bodyPr wrap="square" lIns="0" tIns="0" rIns="0" bIns="0" rtlCol="0" anchor="t"/>
           <a:lstStyle/>
           <a:p>
-            <a:pPr indent="0" marL="0">
+            <a:pPr marL="0" indent="0">
               <a:buNone/>
             </a:pPr>
             <a:r>
@@ -9261,7 +8939,7 @@
           <a:bodyPr wrap="square" lIns="0" tIns="0" rIns="0" bIns="0" rtlCol="0" anchor="ctr"/>
           <a:lstStyle/>
           <a:p>
-            <a:pPr indent="0" marL="0">
+            <a:pPr marL="0" indent="0">
               <a:buNone/>
             </a:pPr>
             <a:r>
@@ -9300,7 +8978,7 @@
           <a:bodyPr wrap="square" lIns="0" tIns="0" rIns="0" bIns="0" rtlCol="0" anchor="t"/>
           <a:lstStyle/>
           <a:p>
-            <a:pPr indent="0" marL="0">
+            <a:pPr marL="0" indent="0">
               <a:buNone/>
             </a:pPr>
             <a:r>
@@ -9372,14 +9050,14 @@
       </p:sp>
       <p:pic>
         <p:nvPicPr>
-          <p:cNvPr id="10" name="Image 0" descr="preencoded.png">    </p:cNvPr>
+          <p:cNvPr id="10" name="Image 0" descr="preencoded.png"/>
           <p:cNvPicPr>
             <a:picLocks noChangeAspect="1"/>
           </p:cNvPicPr>
           <p:nvPr/>
         </p:nvPicPr>
         <p:blipFill>
-          <a:blip r:embed="rId1"/>
+          <a:blip r:embed="rId3"/>
           <a:stretch>
             <a:fillRect/>
           </a:stretch>
@@ -9415,7 +9093,7 @@
           <a:bodyPr wrap="square" lIns="0" tIns="0" rIns="0" bIns="0" rtlCol="0" anchor="ctr"/>
           <a:lstStyle/>
           <a:p>
-            <a:pPr indent="0" marL="0">
+            <a:pPr marL="0" indent="0">
               <a:buNone/>
             </a:pPr>
             <a:r>
@@ -9454,7 +9132,7 @@
           <a:bodyPr wrap="square" lIns="0" tIns="0" rIns="0" bIns="0" rtlCol="0" anchor="t"/>
           <a:lstStyle/>
           <a:p>
-            <a:pPr indent="0" marL="0">
+            <a:pPr marL="0" indent="0">
               <a:spcAft>
                 <a:spcPts val="400"/>
               </a:spcAft>
@@ -9471,14 +9149,28 @@
               </a:rPr>
               <a:t>Fő eszköz beolvasva → </a:t>
             </a:r>
-            <a:pPr indent="0" marL="0">
+            <a:r>
+              <a:rPr lang="en-US" sz="1200" b="1" dirty="0">
+                <a:solidFill>
+                  <a:srgbClr val="1E2A30"/>
+                </a:solidFill>
+                <a:latin typeface="Calibri" pitchFamily="34" charset="0"/>
+                <a:ea typeface="Calibri" pitchFamily="34" charset="-122"/>
+                <a:cs typeface="Calibri" pitchFamily="34" charset="-120"/>
+              </a:rPr>
+              <a:t>feltételezetten megvan</a:t>
+            </a:r>
+            <a:endParaRPr lang="en-US" sz="1200" dirty="0"/>
+          </a:p>
+          <a:p>
+            <a:pPr marL="0" indent="0">
               <a:spcAft>
                 <a:spcPts val="400"/>
               </a:spcAft>
               <a:buNone/>
             </a:pPr>
             <a:r>
-              <a:rPr lang="en-US" sz="1200" b="1" dirty="0">
+              <a:rPr lang="en-US" sz="1200" dirty="0">
                 <a:solidFill>
                   <a:srgbClr val="1E2A30"/>
                 </a:solidFill>
@@ -9486,34 +9178,8 @@
                 <a:ea typeface="Calibri" pitchFamily="34" charset="-122"/>
                 <a:cs typeface="Calibri" pitchFamily="34" charset="-120"/>
               </a:rPr>
-              <a:t>feltételezetten megvan</a:t>
-            </a:r>
-            <a:endParaRPr lang="en-US" sz="1200" dirty="0"/>
-          </a:p>
-          <a:p>
-            <a:pPr indent="0" marL="0">
-              <a:spcAft>
-                <a:spcPts val="400"/>
-              </a:spcAft>
-              <a:buNone/>
-            </a:pPr>
-            <a:r>
-              <a:rPr lang="en-US" sz="1200" dirty="0">
-                <a:solidFill>
-                  <a:srgbClr val="1E2A30"/>
-                </a:solidFill>
-                <a:latin typeface="Calibri" pitchFamily="34" charset="0"/>
-                <a:ea typeface="Calibri" pitchFamily="34" charset="-122"/>
-                <a:cs typeface="Calibri" pitchFamily="34" charset="-120"/>
-              </a:rPr>
               <a:t>Saját kód beolvasva → </a:t>
             </a:r>
-            <a:pPr indent="0" marL="0">
-              <a:spcAft>
-                <a:spcPts val="400"/>
-              </a:spcAft>
-              <a:buNone/>
-            </a:pPr>
             <a:r>
               <a:rPr lang="en-US" sz="1200" b="1" dirty="0">
                 <a:solidFill>
@@ -9583,14 +9249,14 @@
       </p:sp>
       <p:pic>
         <p:nvPicPr>
-          <p:cNvPr id="15" name="Image 1" descr="preencoded.png">    </p:cNvPr>
+          <p:cNvPr id="15" name="Image 1" descr="preencoded.png"/>
           <p:cNvPicPr>
             <a:picLocks noChangeAspect="1"/>
           </p:cNvPicPr>
           <p:nvPr/>
         </p:nvPicPr>
         <p:blipFill>
-          <a:blip r:embed="rId2"/>
+          <a:blip r:embed="rId4"/>
           <a:stretch>
             <a:fillRect/>
           </a:stretch>
@@ -9626,7 +9292,7 @@
           <a:bodyPr wrap="square" lIns="0" tIns="0" rIns="0" bIns="0" rtlCol="0" anchor="ctr"/>
           <a:lstStyle/>
           <a:p>
-            <a:pPr indent="0" marL="0">
+            <a:pPr marL="0" indent="0">
               <a:buNone/>
             </a:pPr>
             <a:r>
@@ -9665,7 +9331,7 @@
           <a:bodyPr wrap="square" lIns="0" tIns="0" rIns="0" bIns="0" rtlCol="0" anchor="ctr"/>
           <a:lstStyle/>
           <a:p>
-            <a:pPr indent="0" marL="0">
+            <a:pPr marL="0" indent="0">
               <a:buNone/>
             </a:pPr>
             <a:r>
@@ -9737,14 +9403,14 @@
       </p:sp>
       <p:pic>
         <p:nvPicPr>
-          <p:cNvPr id="20" name="Image 2" descr="preencoded.png">    </p:cNvPr>
+          <p:cNvPr id="20" name="Image 2" descr="preencoded.png"/>
           <p:cNvPicPr>
             <a:picLocks noChangeAspect="1"/>
           </p:cNvPicPr>
           <p:nvPr/>
         </p:nvPicPr>
         <p:blipFill>
-          <a:blip r:embed="rId3"/>
+          <a:blip r:embed="rId5"/>
           <a:stretch>
             <a:fillRect/>
           </a:stretch>
@@ -9780,7 +9446,7 @@
           <a:bodyPr wrap="square" lIns="0" tIns="0" rIns="0" bIns="0" rtlCol="0" anchor="ctr"/>
           <a:lstStyle/>
           <a:p>
-            <a:pPr indent="0" marL="0">
+            <a:pPr marL="0" indent="0">
               <a:buNone/>
             </a:pPr>
             <a:r>
@@ -9819,7 +9485,7 @@
           <a:bodyPr wrap="square" lIns="0" tIns="0" rIns="0" bIns="0" rtlCol="0" anchor="ctr"/>
           <a:lstStyle/>
           <a:p>
-            <a:pPr indent="0" marL="0">
+            <a:pPr marL="0" indent="0">
               <a:buNone/>
             </a:pPr>
             <a:r>
@@ -9891,14 +9557,14 @@
       </p:sp>
       <p:pic>
         <p:nvPicPr>
-          <p:cNvPr id="25" name="Image 3" descr="preencoded.png">    </p:cNvPr>
+          <p:cNvPr id="25" name="Image 3" descr="preencoded.png"/>
           <p:cNvPicPr>
             <a:picLocks noChangeAspect="1"/>
           </p:cNvPicPr>
           <p:nvPr/>
         </p:nvPicPr>
         <p:blipFill>
-          <a:blip r:embed="rId4"/>
+          <a:blip r:embed="rId6"/>
           <a:stretch>
             <a:fillRect/>
           </a:stretch>
@@ -9934,7 +9600,7 @@
           <a:bodyPr wrap="square" lIns="0" tIns="0" rIns="0" bIns="0" rtlCol="0" anchor="ctr"/>
           <a:lstStyle/>
           <a:p>
-            <a:pPr indent="0" marL="0">
+            <a:pPr marL="0" indent="0">
               <a:buNone/>
             </a:pPr>
             <a:r>
@@ -9973,7 +9639,7 @@
           <a:bodyPr wrap="square" lIns="0" tIns="0" rIns="0" bIns="0" rtlCol="0" anchor="ctr"/>
           <a:lstStyle/>
           <a:p>
-            <a:pPr indent="0" marL="0">
+            <a:pPr marL="0" indent="0">
               <a:buNone/>
             </a:pPr>
             <a:r>
@@ -10045,14 +9711,14 @@
       </p:sp>
       <p:pic>
         <p:nvPicPr>
-          <p:cNvPr id="30" name="Image 4" descr="preencoded.png">    </p:cNvPr>
+          <p:cNvPr id="30" name="Image 4" descr="preencoded.png"/>
           <p:cNvPicPr>
             <a:picLocks noChangeAspect="1"/>
           </p:cNvPicPr>
           <p:nvPr/>
         </p:nvPicPr>
         <p:blipFill>
-          <a:blip r:embed="rId5"/>
+          <a:blip r:embed="rId7"/>
           <a:stretch>
             <a:fillRect/>
           </a:stretch>
@@ -10088,7 +9754,7 @@
           <a:bodyPr wrap="square" lIns="0" tIns="0" rIns="0" bIns="0" rtlCol="0" anchor="ctr"/>
           <a:lstStyle/>
           <a:p>
-            <a:pPr indent="0" marL="0">
+            <a:pPr marL="0" indent="0">
               <a:buNone/>
             </a:pPr>
             <a:r>
@@ -10127,7 +9793,7 @@
           <a:bodyPr wrap="square" lIns="0" tIns="0" rIns="0" bIns="0" rtlCol="0" anchor="ctr"/>
           <a:lstStyle/>
           <a:p>
-            <a:pPr indent="0" marL="0">
+            <a:pPr marL="0" indent="0">
               <a:buNone/>
             </a:pPr>
             <a:r>
@@ -10199,14 +9865,14 @@
       </p:sp>
       <p:pic>
         <p:nvPicPr>
-          <p:cNvPr id="35" name="Image 5" descr="preencoded.png">    </p:cNvPr>
+          <p:cNvPr id="35" name="Image 5" descr="preencoded.png"/>
           <p:cNvPicPr>
             <a:picLocks noChangeAspect="1"/>
           </p:cNvPicPr>
           <p:nvPr/>
         </p:nvPicPr>
         <p:blipFill>
-          <a:blip r:embed="rId6"/>
+          <a:blip r:embed="rId8"/>
           <a:stretch>
             <a:fillRect/>
           </a:stretch>
@@ -10242,7 +9908,7 @@
           <a:bodyPr wrap="square" lIns="0" tIns="0" rIns="0" bIns="0" rtlCol="0" anchor="ctr"/>
           <a:lstStyle/>
           <a:p>
-            <a:pPr indent="0" marL="0">
+            <a:pPr marL="0" indent="0">
               <a:buNone/>
             </a:pPr>
             <a:r>
@@ -10281,7 +9947,7 @@
           <a:bodyPr wrap="square" lIns="0" tIns="0" rIns="0" bIns="0" rtlCol="0" anchor="ctr"/>
           <a:lstStyle/>
           <a:p>
-            <a:pPr indent="0" marL="0">
+            <a:pPr marL="0" indent="0">
               <a:buNone/>
             </a:pPr>
             <a:r>
@@ -10320,7 +9986,7 @@
           <a:bodyPr wrap="square" lIns="0" tIns="0" rIns="0" bIns="0" rtlCol="0" anchor="t"/>
           <a:lstStyle/>
           <a:p>
-            <a:pPr algn="r" indent="0" marL="0">
+            <a:pPr marL="0" indent="0" algn="r">
               <a:buNone/>
             </a:pPr>
             <a:r>
@@ -10354,6 +10020,7 @@
         <a:solidFill>
           <a:srgbClr val="FFFFFF"/>
         </a:solidFill>
+        <a:effectLst/>
       </p:bgPr>
     </p:bg>
     <p:spTree>
@@ -10391,7 +10058,7 @@
           <a:bodyPr wrap="square" lIns="0" tIns="0" rIns="0" bIns="0" rtlCol="0" anchor="ctr"/>
           <a:lstStyle/>
           <a:p>
-            <a:pPr indent="0" marL="0">
+            <a:pPr marL="0" indent="0">
               <a:buNone/>
             </a:pPr>
             <a:r>
@@ -10463,14 +10130,14 @@
       </p:sp>
       <p:pic>
         <p:nvPicPr>
-          <p:cNvPr id="5" name="Image 0" descr="preencoded.png">    </p:cNvPr>
+          <p:cNvPr id="5" name="Image 0" descr="preencoded.png"/>
           <p:cNvPicPr>
             <a:picLocks noChangeAspect="1"/>
           </p:cNvPicPr>
           <p:nvPr/>
         </p:nvPicPr>
         <p:blipFill>
-          <a:blip r:embed="rId1"/>
+          <a:blip r:embed="rId3"/>
           <a:stretch>
             <a:fillRect/>
           </a:stretch>
@@ -10506,7 +10173,7 @@
           <a:bodyPr wrap="square" lIns="0" tIns="0" rIns="0" bIns="0" rtlCol="0" anchor="ctr"/>
           <a:lstStyle/>
           <a:p>
-            <a:pPr indent="0" marL="0">
+            <a:pPr marL="0" indent="0">
               <a:buNone/>
             </a:pPr>
             <a:r>
@@ -10663,14 +10330,14 @@
       </p:sp>
       <p:pic>
         <p:nvPicPr>
-          <p:cNvPr id="10" name="Image 1" descr="preencoded.png">    </p:cNvPr>
+          <p:cNvPr id="10" name="Image 1" descr="preencoded.png"/>
           <p:cNvPicPr>
             <a:picLocks noChangeAspect="1"/>
           </p:cNvPicPr>
           <p:nvPr/>
         </p:nvPicPr>
         <p:blipFill>
-          <a:blip r:embed="rId2"/>
+          <a:blip r:embed="rId4"/>
           <a:stretch>
             <a:fillRect/>
           </a:stretch>
@@ -10706,7 +10373,7 @@
           <a:bodyPr wrap="square" lIns="0" tIns="0" rIns="0" bIns="0" rtlCol="0" anchor="ctr"/>
           <a:lstStyle/>
           <a:p>
-            <a:pPr indent="0" marL="0">
+            <a:pPr marL="0" indent="0">
               <a:buNone/>
             </a:pPr>
             <a:r>
@@ -10863,14 +10530,14 @@
       </p:sp>
       <p:pic>
         <p:nvPicPr>
-          <p:cNvPr id="15" name="Image 2" descr="preencoded.png">    </p:cNvPr>
+          <p:cNvPr id="15" name="Image 2" descr="preencoded.png"/>
           <p:cNvPicPr>
             <a:picLocks noChangeAspect="1"/>
           </p:cNvPicPr>
           <p:nvPr/>
         </p:nvPicPr>
         <p:blipFill>
-          <a:blip r:embed="rId3"/>
+          <a:blip r:embed="rId5"/>
           <a:stretch>
             <a:fillRect/>
           </a:stretch>
@@ -10906,7 +10573,7 @@
           <a:bodyPr wrap="square" lIns="0" tIns="0" rIns="0" bIns="0" rtlCol="0" anchor="ctr"/>
           <a:lstStyle/>
           <a:p>
-            <a:pPr indent="0" marL="0">
+            <a:pPr marL="0" indent="0">
               <a:buNone/>
             </a:pPr>
             <a:r>
@@ -11055,7 +10722,7 @@
           <a:bodyPr wrap="square" lIns="0" tIns="0" rIns="0" bIns="0" rtlCol="0" anchor="b"/>
           <a:lstStyle/>
           <a:p>
-            <a:pPr algn="ctr" indent="0" marL="0">
+            <a:pPr marL="0" indent="0" algn="ctr">
               <a:buNone/>
             </a:pPr>
             <a:r>
@@ -11072,7 +10739,7 @@
             <a:endParaRPr lang="en-US" sz="900" dirty="0"/>
           </a:p>
           <a:p>
-            <a:pPr algn="ctr" indent="0" marL="0">
+            <a:pPr marL="0" indent="0" algn="ctr">
               <a:buNone/>
             </a:pPr>
             <a:r>
@@ -11136,7 +10803,7 @@
           <a:bodyPr wrap="square" lIns="0" tIns="0" rIns="0" bIns="0" rtlCol="0" anchor="b"/>
           <a:lstStyle/>
           <a:p>
-            <a:pPr algn="ctr" indent="0" marL="0">
+            <a:pPr marL="0" indent="0" algn="ctr">
               <a:buNone/>
             </a:pPr>
             <a:r>
@@ -11202,7 +10869,7 @@
           <a:bodyPr wrap="square" lIns="0" tIns="0" rIns="0" bIns="0" rtlCol="0" anchor="ctr"/>
           <a:lstStyle/>
           <a:p>
-            <a:pPr indent="0" marL="0">
+            <a:pPr marL="0" indent="0">
               <a:buNone/>
             </a:pPr>
             <a:r>
@@ -11216,9 +10883,6 @@
               </a:rPr>
               <a:t>Kozos projekt  </a:t>
             </a:r>
-            <a:pPr indent="0" marL="0">
-              <a:buNone/>
-            </a:pPr>
             <a:r>
               <a:rPr lang="en-US" sz="1200" dirty="0">
                 <a:solidFill>
@@ -11282,7 +10946,7 @@
           <a:bodyPr wrap="square" lIns="0" tIns="0" rIns="0" bIns="0" rtlCol="0" anchor="ctr"/>
           <a:lstStyle/>
           <a:p>
-            <a:pPr indent="0" marL="0">
+            <a:pPr marL="0" indent="0">
               <a:buNone/>
             </a:pPr>
             <a:r>
@@ -11296,9 +10960,6 @@
               </a:rPr>
               <a:t>.NET 8 (LTS)  </a:t>
             </a:r>
-            <a:pPr indent="0" marL="0">
-              <a:buNone/>
-            </a:pPr>
             <a:r>
               <a:rPr lang="en-US" sz="1200" dirty="0">
                 <a:solidFill>
@@ -11335,7 +10996,7 @@
           <a:bodyPr wrap="square" lIns="0" tIns="0" rIns="0" bIns="0" rtlCol="0" anchor="t"/>
           <a:lstStyle/>
           <a:p>
-            <a:pPr indent="0" marL="0">
+            <a:pPr marL="0" indent="0">
               <a:buNone/>
             </a:pPr>
             <a:r>
@@ -11374,7 +11035,7 @@
           <a:bodyPr wrap="square" lIns="0" tIns="0" rIns="0" bIns="0" rtlCol="0" anchor="t"/>
           <a:lstStyle/>
           <a:p>
-            <a:pPr algn="r" indent="0" marL="0">
+            <a:pPr marL="0" indent="0" algn="r">
               <a:buNone/>
             </a:pPr>
             <a:r>
@@ -11408,6 +11069,7 @@
         <a:solidFill>
           <a:srgbClr val="FFFFFF"/>
         </a:solidFill>
+        <a:effectLst/>
       </p:bgPr>
     </p:bg>
     <p:spTree>
@@ -11445,7 +11107,7 @@
           <a:bodyPr wrap="square" lIns="0" tIns="0" rIns="0" bIns="0" rtlCol="0" anchor="ctr"/>
           <a:lstStyle/>
           <a:p>
-            <a:pPr indent="0" marL="0">
+            <a:pPr marL="0" indent="0">
               <a:buNone/>
             </a:pPr>
             <a:r>
@@ -11511,7 +11173,7 @@
           <a:bodyPr wrap="square" lIns="0" tIns="0" rIns="0" bIns="0" rtlCol="0" anchor="t"/>
           <a:lstStyle/>
           <a:p>
-            <a:pPr indent="0" marL="0">
+            <a:pPr marL="0" indent="0">
               <a:buNone/>
             </a:pPr>
             <a:r>
@@ -11550,7 +11212,7 @@
           <a:bodyPr wrap="square" lIns="0" tIns="0" rIns="0" bIns="0" rtlCol="0" anchor="t"/>
           <a:lstStyle/>
           <a:p>
-            <a:pPr indent="0" marL="0">
+            <a:pPr marL="0" indent="0">
               <a:buNone/>
             </a:pPr>
             <a:r>
@@ -11616,7 +11278,7 @@
           <a:bodyPr wrap="square" lIns="0" tIns="0" rIns="0" bIns="0" rtlCol="0" anchor="t"/>
           <a:lstStyle/>
           <a:p>
-            <a:pPr indent="0" marL="0">
+            <a:pPr marL="0" indent="0">
               <a:buNone/>
             </a:pPr>
             <a:r>
@@ -11655,7 +11317,7 @@
           <a:bodyPr wrap="square" lIns="0" tIns="0" rIns="0" bIns="0" rtlCol="0" anchor="t"/>
           <a:lstStyle/>
           <a:p>
-            <a:pPr indent="0" marL="0">
+            <a:pPr marL="0" indent="0">
               <a:buNone/>
             </a:pPr>
             <a:r>
@@ -11721,7 +11383,7 @@
           <a:bodyPr wrap="square" lIns="0" tIns="0" rIns="0" bIns="0" rtlCol="0" anchor="t"/>
           <a:lstStyle/>
           <a:p>
-            <a:pPr indent="0" marL="0">
+            <a:pPr marL="0" indent="0">
               <a:buNone/>
             </a:pPr>
             <a:r>
@@ -11760,7 +11422,7 @@
           <a:bodyPr wrap="square" lIns="0" tIns="0" rIns="0" bIns="0" rtlCol="0" anchor="t"/>
           <a:lstStyle/>
           <a:p>
-            <a:pPr indent="0" marL="0">
+            <a:pPr marL="0" indent="0">
               <a:buNone/>
             </a:pPr>
             <a:r>
@@ -11826,7 +11488,7 @@
           <a:bodyPr wrap="square" lIns="0" tIns="0" rIns="0" bIns="0" rtlCol="0" anchor="t"/>
           <a:lstStyle/>
           <a:p>
-            <a:pPr indent="0" marL="0">
+            <a:pPr marL="0" indent="0">
               <a:buNone/>
             </a:pPr>
             <a:r>
@@ -11865,7 +11527,7 @@
           <a:bodyPr wrap="square" lIns="0" tIns="0" rIns="0" bIns="0" rtlCol="0" anchor="t"/>
           <a:lstStyle/>
           <a:p>
-            <a:pPr indent="0" marL="0">
+            <a:pPr marL="0" indent="0">
               <a:buNone/>
             </a:pPr>
             <a:r>
@@ -12016,7 +11678,7 @@
           <a:bodyPr wrap="square" lIns="0" tIns="0" rIns="0" bIns="0" rtlCol="0" anchor="ctr"/>
           <a:lstStyle/>
           <a:p>
-            <a:pPr indent="0" marL="0">
+            <a:pPr marL="0" indent="0">
               <a:buNone/>
             </a:pPr>
             <a:r>
@@ -12055,7 +11717,7 @@
           <a:bodyPr wrap="square" lIns="0" tIns="0" rIns="0" bIns="0" rtlCol="0" anchor="t"/>
           <a:lstStyle/>
           <a:p>
-            <a:pPr indent="0" marL="0">
+            <a:pPr marL="0" indent="0">
               <a:buNone/>
             </a:pPr>
             <a:r>
@@ -12094,7 +11756,7 @@
           <a:bodyPr wrap="square" lIns="0" tIns="0" rIns="0" bIns="0" rtlCol="0" anchor="ctr"/>
           <a:lstStyle/>
           <a:p>
-            <a:pPr indent="0" marL="0">
+            <a:pPr marL="0" indent="0">
               <a:buNone/>
             </a:pPr>
             <a:r>
@@ -12133,7 +11795,7 @@
           <a:bodyPr wrap="square" lIns="0" tIns="0" rIns="0" bIns="0" rtlCol="0" anchor="t"/>
           <a:lstStyle/>
           <a:p>
-            <a:pPr indent="0" marL="0">
+            <a:pPr marL="0" indent="0">
               <a:buNone/>
             </a:pPr>
             <a:r>
@@ -12172,7 +11834,7 @@
           <a:bodyPr wrap="square" lIns="0" tIns="0" rIns="0" bIns="0" rtlCol="0" anchor="ctr"/>
           <a:lstStyle/>
           <a:p>
-            <a:pPr indent="0" marL="0">
+            <a:pPr marL="0" indent="0">
               <a:buNone/>
             </a:pPr>
             <a:r>
@@ -12211,7 +11873,7 @@
           <a:bodyPr wrap="square" lIns="0" tIns="0" rIns="0" bIns="0" rtlCol="0" anchor="t"/>
           <a:lstStyle/>
           <a:p>
-            <a:pPr indent="0" marL="0">
+            <a:pPr marL="0" indent="0">
               <a:buNone/>
             </a:pPr>
             <a:r>
@@ -12250,7 +11912,7 @@
           <a:bodyPr wrap="square" lIns="0" tIns="0" rIns="0" bIns="0" rtlCol="0" anchor="t"/>
           <a:lstStyle/>
           <a:p>
-            <a:pPr algn="r" indent="0" marL="0">
+            <a:pPr marL="0" indent="0" algn="r">
               <a:buNone/>
             </a:pPr>
             <a:r>
@@ -12284,6 +11946,7 @@
         <a:solidFill>
           <a:srgbClr val="FFFFFF"/>
         </a:solidFill>
+        <a:effectLst/>
       </p:bgPr>
     </p:bg>
     <p:spTree>
@@ -12321,7 +11984,7 @@
           <a:bodyPr wrap="square" lIns="0" tIns="0" rIns="0" bIns="0" rtlCol="0" anchor="ctr"/>
           <a:lstStyle/>
           <a:p>
-            <a:pPr indent="0" marL="0">
+            <a:pPr marL="0" indent="0">
               <a:buNone/>
             </a:pPr>
             <a:r>
@@ -12387,7 +12050,7 @@
           <a:bodyPr wrap="square" lIns="0" tIns="0" rIns="0" bIns="0" rtlCol="0" anchor="ctr"/>
           <a:lstStyle/>
           <a:p>
-            <a:pPr indent="0" marL="0">
+            <a:pPr marL="0" indent="0">
               <a:buNone/>
             </a:pPr>
             <a:r>
@@ -12426,7 +12089,7 @@
           <a:bodyPr wrap="square" lIns="0" tIns="0" rIns="0" bIns="0" rtlCol="0" anchor="ctr"/>
           <a:lstStyle/>
           <a:p>
-            <a:pPr indent="0" marL="0">
+            <a:pPr marL="0" indent="0">
               <a:buNone/>
             </a:pPr>
             <a:r>
@@ -12465,7 +12128,7 @@
           <a:bodyPr wrap="square" lIns="0" tIns="0" rIns="0" bIns="0" rtlCol="0" anchor="ctr"/>
           <a:lstStyle/>
           <a:p>
-            <a:pPr indent="0" marL="0">
+            <a:pPr marL="0" indent="0">
               <a:buNone/>
             </a:pPr>
             <a:r>
@@ -12531,7 +12194,7 @@
           <a:bodyPr wrap="square" lIns="0" tIns="0" rIns="0" bIns="0" rtlCol="0" anchor="ctr"/>
           <a:lstStyle/>
           <a:p>
-            <a:pPr indent="0" marL="0">
+            <a:pPr marL="0" indent="0">
               <a:buNone/>
             </a:pPr>
             <a:r>
@@ -12570,7 +12233,7 @@
           <a:bodyPr wrap="square" lIns="0" tIns="0" rIns="0" bIns="0" rtlCol="0" anchor="ctr"/>
           <a:lstStyle/>
           <a:p>
-            <a:pPr indent="0" marL="0">
+            <a:pPr marL="0" indent="0">
               <a:buNone/>
             </a:pPr>
             <a:r>
@@ -12609,7 +12272,7 @@
           <a:bodyPr wrap="square" lIns="0" tIns="0" rIns="0" bIns="0" rtlCol="0" anchor="ctr"/>
           <a:lstStyle/>
           <a:p>
-            <a:pPr indent="0" marL="0">
+            <a:pPr marL="0" indent="0">
               <a:buNone/>
             </a:pPr>
             <a:r>
@@ -12675,7 +12338,7 @@
           <a:bodyPr wrap="square" lIns="0" tIns="0" rIns="0" bIns="0" rtlCol="0" anchor="ctr"/>
           <a:lstStyle/>
           <a:p>
-            <a:pPr indent="0" marL="0">
+            <a:pPr marL="0" indent="0">
               <a:buNone/>
             </a:pPr>
             <a:r>
@@ -12714,7 +12377,7 @@
           <a:bodyPr wrap="square" lIns="0" tIns="0" rIns="0" bIns="0" rtlCol="0" anchor="ctr"/>
           <a:lstStyle/>
           <a:p>
-            <a:pPr indent="0" marL="0">
+            <a:pPr marL="0" indent="0">
               <a:buNone/>
             </a:pPr>
             <a:r>
@@ -12753,7 +12416,7 @@
           <a:bodyPr wrap="square" lIns="0" tIns="0" rIns="0" bIns="0" rtlCol="0" anchor="ctr"/>
           <a:lstStyle/>
           <a:p>
-            <a:pPr indent="0" marL="0">
+            <a:pPr marL="0" indent="0">
               <a:buNone/>
             </a:pPr>
             <a:r>
@@ -12819,7 +12482,7 @@
           <a:bodyPr wrap="square" lIns="0" tIns="0" rIns="0" bIns="0" rtlCol="0" anchor="ctr"/>
           <a:lstStyle/>
           <a:p>
-            <a:pPr indent="0" marL="0">
+            <a:pPr marL="0" indent="0">
               <a:buNone/>
             </a:pPr>
             <a:r>
@@ -12858,7 +12521,7 @@
           <a:bodyPr wrap="square" lIns="0" tIns="0" rIns="0" bIns="0" rtlCol="0" anchor="ctr"/>
           <a:lstStyle/>
           <a:p>
-            <a:pPr indent="0" marL="0">
+            <a:pPr marL="0" indent="0">
               <a:buNone/>
             </a:pPr>
             <a:r>
@@ -12897,7 +12560,7 @@
           <a:bodyPr wrap="square" lIns="0" tIns="0" rIns="0" bIns="0" rtlCol="0" anchor="ctr"/>
           <a:lstStyle/>
           <a:p>
-            <a:pPr indent="0" marL="0">
+            <a:pPr marL="0" indent="0">
               <a:buNone/>
             </a:pPr>
             <a:r>
@@ -12963,7 +12626,7 @@
           <a:bodyPr wrap="square" lIns="0" tIns="0" rIns="0" bIns="0" rtlCol="0" anchor="ctr"/>
           <a:lstStyle/>
           <a:p>
-            <a:pPr indent="0" marL="0">
+            <a:pPr marL="0" indent="0">
               <a:buNone/>
             </a:pPr>
             <a:r>
@@ -13002,7 +12665,7 @@
           <a:bodyPr wrap="square" lIns="0" tIns="0" rIns="0" bIns="0" rtlCol="0" anchor="ctr"/>
           <a:lstStyle/>
           <a:p>
-            <a:pPr indent="0" marL="0">
+            <a:pPr marL="0" indent="0">
               <a:buNone/>
             </a:pPr>
             <a:r>
@@ -13041,7 +12704,7 @@
           <a:bodyPr wrap="square" lIns="0" tIns="0" rIns="0" bIns="0" rtlCol="0" anchor="ctr"/>
           <a:lstStyle/>
           <a:p>
-            <a:pPr indent="0" marL="0">
+            <a:pPr marL="0" indent="0">
               <a:buNone/>
             </a:pPr>
             <a:r>
@@ -13213,7 +12876,7 @@
           <a:bodyPr wrap="square" lIns="0" tIns="0" rIns="0" bIns="0" rtlCol="0" anchor="ctr"/>
           <a:lstStyle/>
           <a:p>
-            <a:pPr indent="0" marL="0">
+            <a:pPr marL="0" indent="0">
               <a:buNone/>
             </a:pPr>
             <a:r>
@@ -13252,7 +12915,7 @@
           <a:bodyPr wrap="square" lIns="0" tIns="0" rIns="0" bIns="0" rtlCol="0" anchor="t"/>
           <a:lstStyle/>
           <a:p>
-            <a:pPr indent="0" marL="0">
+            <a:pPr marL="0" indent="0">
               <a:buNone/>
             </a:pPr>
             <a:r>
@@ -13291,7 +12954,7 @@
           <a:bodyPr wrap="square" lIns="0" tIns="0" rIns="0" bIns="0" rtlCol="0" anchor="t"/>
           <a:lstStyle/>
           <a:p>
-            <a:pPr indent="0" marL="0">
+            <a:pPr marL="0" indent="0">
               <a:buNone/>
             </a:pPr>
             <a:r>
@@ -13330,7 +12993,7 @@
           <a:bodyPr wrap="square" lIns="0" tIns="0" rIns="0" bIns="0" rtlCol="0" anchor="t"/>
           <a:lstStyle/>
           <a:p>
-            <a:pPr algn="r" indent="0" marL="0">
+            <a:pPr marL="0" indent="0" algn="r">
               <a:buNone/>
             </a:pPr>
             <a:r>
@@ -13364,6 +13027,7 @@
         <a:solidFill>
           <a:srgbClr val="FFFFFF"/>
         </a:solidFill>
+        <a:effectLst/>
       </p:bgPr>
     </p:bg>
     <p:spTree>
@@ -13401,7 +13065,7 @@
           <a:bodyPr wrap="square" lIns="0" tIns="0" rIns="0" bIns="0" rtlCol="0" anchor="ctr"/>
           <a:lstStyle/>
           <a:p>
-            <a:pPr indent="0" marL="0">
+            <a:pPr marL="0" indent="0">
               <a:buNone/>
             </a:pPr>
             <a:r>
@@ -13440,7 +13104,7 @@
           <a:bodyPr wrap="square" lIns="0" tIns="0" rIns="0" bIns="0" rtlCol="0" anchor="t"/>
           <a:lstStyle/>
           <a:p>
-            <a:pPr indent="0" marL="0">
+            <a:pPr marL="0" indent="0">
               <a:buNone/>
             </a:pPr>
             <a:r>
@@ -13479,7 +13143,7 @@
           <a:bodyPr wrap="square" lIns="0" tIns="0" rIns="0" bIns="0" rtlCol="0" anchor="ctr"/>
           <a:lstStyle/>
           <a:p>
-            <a:pPr indent="0" marL="0">
+            <a:pPr marL="0" indent="0">
               <a:buNone/>
             </a:pPr>
             <a:r>
@@ -13518,7 +13182,7 @@
           <a:bodyPr wrap="square" lIns="0" tIns="0" rIns="0" bIns="0" rtlCol="0" anchor="t"/>
           <a:lstStyle/>
           <a:p>
-            <a:pPr indent="0" marL="0">
+            <a:pPr marL="0" indent="0">
               <a:buNone/>
             </a:pPr>
             <a:r>
@@ -13557,7 +13221,7 @@
           <a:bodyPr wrap="square" lIns="0" tIns="0" rIns="0" bIns="0" rtlCol="0" anchor="ctr"/>
           <a:lstStyle/>
           <a:p>
-            <a:pPr indent="0" marL="0">
+            <a:pPr marL="0" indent="0">
               <a:buNone/>
             </a:pPr>
             <a:r>
@@ -13596,7 +13260,7 @@
           <a:bodyPr wrap="square" lIns="0" tIns="0" rIns="0" bIns="0" rtlCol="0" anchor="t"/>
           <a:lstStyle/>
           <a:p>
-            <a:pPr indent="0" marL="0">
+            <a:pPr marL="0" indent="0">
               <a:buNone/>
             </a:pPr>
             <a:r>
@@ -13635,7 +13299,7 @@
           <a:bodyPr wrap="square" lIns="0" tIns="0" rIns="0" bIns="0" rtlCol="0" anchor="ctr"/>
           <a:lstStyle/>
           <a:p>
-            <a:pPr indent="0" marL="0">
+            <a:pPr marL="0" indent="0">
               <a:buNone/>
             </a:pPr>
             <a:r>
@@ -13674,7 +13338,7 @@
           <a:bodyPr wrap="square" lIns="0" tIns="0" rIns="0" bIns="0" rtlCol="0" anchor="t"/>
           <a:lstStyle/>
           <a:p>
-            <a:pPr indent="0" marL="0">
+            <a:pPr marL="0" indent="0">
               <a:buNone/>
             </a:pPr>
             <a:r>
@@ -13713,7 +13377,7 @@
           <a:bodyPr wrap="square" lIns="0" tIns="0" rIns="0" bIns="0" rtlCol="0" anchor="ctr"/>
           <a:lstStyle/>
           <a:p>
-            <a:pPr indent="0" marL="0">
+            <a:pPr marL="0" indent="0">
               <a:buNone/>
             </a:pPr>
             <a:r>
@@ -13752,7 +13416,7 @@
           <a:bodyPr wrap="square" lIns="0" tIns="0" rIns="0" bIns="0" rtlCol="0" anchor="t"/>
           <a:lstStyle/>
           <a:p>
-            <a:pPr indent="0" marL="0">
+            <a:pPr marL="0" indent="0">
               <a:buNone/>
             </a:pPr>
             <a:r>
@@ -13791,7 +13455,7 @@
           <a:bodyPr wrap="square" lIns="0" tIns="0" rIns="0" bIns="0" rtlCol="0" anchor="t"/>
           <a:lstStyle/>
           <a:p>
-            <a:pPr indent="0" marL="0">
+            <a:pPr marL="0" indent="0">
               <a:buNone/>
             </a:pPr>
             <a:r>
@@ -13811,7 +13475,7 @@
       </p:sp>
       <p:graphicFrame>
         <p:nvGraphicFramePr>
-          <p:cNvPr id="13" name="Chart 0" descr=""/>
+          <p:cNvPr id="13" name="Chart 0"/>
           <p:cNvGraphicFramePr/>
           <p:nvPr/>
         </p:nvGraphicFramePr>
@@ -13819,9 +13483,9 @@
           <a:off x="4389120" y="1234440"/>
           <a:ext cx="4297680" cy="3337560"/>
         </p:xfrm>
-        <a:graphic xmlns:a="http://schemas.openxmlformats.org/drawingml/2006/main">
+        <a:graphic>
           <a:graphicData uri="http://schemas.openxmlformats.org/drawingml/2006/chart">
-            <c:chart xmlns:c="http://schemas.openxmlformats.org/drawingml/2006/chart" r:id="rId1"/>
+            <c:chart xmlns:c="http://schemas.openxmlformats.org/drawingml/2006/chart" xmlns:r="http://schemas.openxmlformats.org/officeDocument/2006/relationships" r:id="rId3"/>
           </a:graphicData>
         </a:graphic>
       </p:graphicFrame>
@@ -13846,7 +13510,7 @@
           <a:bodyPr wrap="square" lIns="0" tIns="0" rIns="0" bIns="0" rtlCol="0" anchor="t"/>
           <a:lstStyle/>
           <a:p>
-            <a:pPr algn="r" indent="0" marL="0">
+            <a:pPr marL="0" indent="0" algn="r">
               <a:buNone/>
             </a:pPr>
             <a:r>
@@ -14165,4 +13829,265 @@
     </a:ext>
   </a:extLst>
 </a:theme>
+</file>
+
+<file path=ppt/theme/theme2.xml><?xml version="1.0" encoding="utf-8"?>
+<a:theme xmlns:a="http://schemas.openxmlformats.org/drawingml/2006/main" name="Office-téma">
+  <a:themeElements>
+    <a:clrScheme name="Office">
+      <a:dk1>
+        <a:sysClr val="windowText" lastClr="000000"/>
+      </a:dk1>
+      <a:lt1>
+        <a:sysClr val="window" lastClr="FFFFFF"/>
+      </a:lt1>
+      <a:dk2>
+        <a:srgbClr val="44546A"/>
+      </a:dk2>
+      <a:lt2>
+        <a:srgbClr val="E7E6E6"/>
+      </a:lt2>
+      <a:accent1>
+        <a:srgbClr val="5B9BD5"/>
+      </a:accent1>
+      <a:accent2>
+        <a:srgbClr val="ED7D31"/>
+      </a:accent2>
+      <a:accent3>
+        <a:srgbClr val="A5A5A5"/>
+      </a:accent3>
+      <a:accent4>
+        <a:srgbClr val="FFC000"/>
+      </a:accent4>
+      <a:accent5>
+        <a:srgbClr val="4472C4"/>
+      </a:accent5>
+      <a:accent6>
+        <a:srgbClr val="70AD47"/>
+      </a:accent6>
+      <a:hlink>
+        <a:srgbClr val="0563C1"/>
+      </a:hlink>
+      <a:folHlink>
+        <a:srgbClr val="954F72"/>
+      </a:folHlink>
+    </a:clrScheme>
+    <a:fontScheme name="Office">
+      <a:majorFont>
+        <a:latin typeface="Calibri Light" panose="020F0302020204030204"/>
+        <a:ea typeface=""/>
+        <a:cs typeface=""/>
+        <a:font script="Jpan" typeface="游ゴシック Light"/>
+        <a:font script="Hang" typeface="맑은 고딕"/>
+        <a:font script="Hans" typeface="等线 Light"/>
+        <a:font script="Hant" typeface="新細明體"/>
+        <a:font script="Arab" typeface="Times New Roman"/>
+        <a:font script="Hebr" typeface="Times New Roman"/>
+        <a:font script="Thai" typeface="Angsana New"/>
+        <a:font script="Ethi" typeface="Nyala"/>
+        <a:font script="Beng" typeface="Vrinda"/>
+        <a:font script="Gujr" typeface="Shruti"/>
+        <a:font script="Khmr" typeface="MoolBoran"/>
+        <a:font script="Knda" typeface="Tunga"/>
+        <a:font script="Guru" typeface="Raavi"/>
+        <a:font script="Cans" typeface="Euphemia"/>
+        <a:font script="Cher" typeface="Plantagenet Cherokee"/>
+        <a:font script="Yiii" typeface="Microsoft Yi Baiti"/>
+        <a:font script="Tibt" typeface="Microsoft Himalaya"/>
+        <a:font script="Thaa" typeface="MV Boli"/>
+        <a:font script="Deva" typeface="Mangal"/>
+        <a:font script="Telu" typeface="Gautami"/>
+        <a:font script="Taml" typeface="Latha"/>
+        <a:font script="Syrc" typeface="Estrangelo Edessa"/>
+        <a:font script="Orya" typeface="Kalinga"/>
+        <a:font script="Mlym" typeface="Kartika"/>
+        <a:font script="Laoo" typeface="DokChampa"/>
+        <a:font script="Sinh" typeface="Iskoola Pota"/>
+        <a:font script="Mong" typeface="Mongolian Baiti"/>
+        <a:font script="Viet" typeface="Times New Roman"/>
+        <a:font script="Uigh" typeface="Microsoft Uighur"/>
+        <a:font script="Geor" typeface="Sylfaen"/>
+      </a:majorFont>
+      <a:minorFont>
+        <a:latin typeface="Calibri" panose="020F0502020204030204"/>
+        <a:ea typeface=""/>
+        <a:cs typeface=""/>
+        <a:font script="Jpan" typeface="游ゴシック"/>
+        <a:font script="Hang" typeface="맑은 고딕"/>
+        <a:font script="Hans" typeface="等线"/>
+        <a:font script="Hant" typeface="新細明體"/>
+        <a:font script="Arab" typeface="Arial"/>
+        <a:font script="Hebr" typeface="Arial"/>
+        <a:font script="Thai" typeface="Cordia New"/>
+        <a:font script="Ethi" typeface="Nyala"/>
+        <a:font script="Beng" typeface="Vrinda"/>
+        <a:font script="Gujr" typeface="Shruti"/>
+        <a:font script="Khmr" typeface="DaunPenh"/>
+        <a:font script="Knda" typeface="Tunga"/>
+        <a:font script="Guru" typeface="Raavi"/>
+        <a:font script="Cans" typeface="Euphemia"/>
+        <a:font script="Cher" typeface="Plantagenet Cherokee"/>
+        <a:font script="Yiii" typeface="Microsoft Yi Baiti"/>
+        <a:font script="Tibt" typeface="Microsoft Himalaya"/>
+        <a:font script="Thaa" typeface="MV Boli"/>
+        <a:font script="Deva" typeface="Mangal"/>
+        <a:font script="Telu" typeface="Gautami"/>
+        <a:font script="Taml" typeface="Latha"/>
+        <a:font script="Syrc" typeface="Estrangelo Edessa"/>
+        <a:font script="Orya" typeface="Kalinga"/>
+        <a:font script="Mlym" typeface="Kartika"/>
+        <a:font script="Laoo" typeface="DokChampa"/>
+        <a:font script="Sinh" typeface="Iskoola Pota"/>
+        <a:font script="Mong" typeface="Mongolian Baiti"/>
+        <a:font script="Viet" typeface="Arial"/>
+        <a:font script="Uigh" typeface="Microsoft Uighur"/>
+        <a:font script="Geor" typeface="Sylfaen"/>
+      </a:minorFont>
+    </a:fontScheme>
+    <a:fmtScheme name="Office">
+      <a:fillStyleLst>
+        <a:solidFill>
+          <a:schemeClr val="phClr"/>
+        </a:solidFill>
+        <a:gradFill rotWithShape="1">
+          <a:gsLst>
+            <a:gs pos="0">
+              <a:schemeClr val="phClr">
+                <a:lumMod val="110000"/>
+                <a:satMod val="105000"/>
+                <a:tint val="67000"/>
+              </a:schemeClr>
+            </a:gs>
+            <a:gs pos="50000">
+              <a:schemeClr val="phClr">
+                <a:lumMod val="105000"/>
+                <a:satMod val="103000"/>
+                <a:tint val="73000"/>
+              </a:schemeClr>
+            </a:gs>
+            <a:gs pos="100000">
+              <a:schemeClr val="phClr">
+                <a:lumMod val="105000"/>
+                <a:satMod val="109000"/>
+                <a:tint val="81000"/>
+              </a:schemeClr>
+            </a:gs>
+          </a:gsLst>
+          <a:lin ang="5400000" scaled="0"/>
+        </a:gradFill>
+        <a:gradFill rotWithShape="1">
+          <a:gsLst>
+            <a:gs pos="0">
+              <a:schemeClr val="phClr">
+                <a:satMod val="103000"/>
+                <a:lumMod val="102000"/>
+                <a:tint val="94000"/>
+              </a:schemeClr>
+            </a:gs>
+            <a:gs pos="50000">
+              <a:schemeClr val="phClr">
+                <a:satMod val="110000"/>
+                <a:lumMod val="100000"/>
+                <a:shade val="100000"/>
+              </a:schemeClr>
+            </a:gs>
+            <a:gs pos="100000">
+              <a:schemeClr val="phClr">
+                <a:lumMod val="99000"/>
+                <a:satMod val="120000"/>
+                <a:shade val="78000"/>
+              </a:schemeClr>
+            </a:gs>
+          </a:gsLst>
+          <a:lin ang="5400000" scaled="0"/>
+        </a:gradFill>
+      </a:fillStyleLst>
+      <a:lnStyleLst>
+        <a:ln w="6350" cap="flat" cmpd="sng" algn="ctr">
+          <a:solidFill>
+            <a:schemeClr val="phClr"/>
+          </a:solidFill>
+          <a:prstDash val="solid"/>
+          <a:miter lim="800000"/>
+        </a:ln>
+        <a:ln w="12700" cap="flat" cmpd="sng" algn="ctr">
+          <a:solidFill>
+            <a:schemeClr val="phClr"/>
+          </a:solidFill>
+          <a:prstDash val="solid"/>
+          <a:miter lim="800000"/>
+        </a:ln>
+        <a:ln w="19050" cap="flat" cmpd="sng" algn="ctr">
+          <a:solidFill>
+            <a:schemeClr val="phClr"/>
+          </a:solidFill>
+          <a:prstDash val="solid"/>
+          <a:miter lim="800000"/>
+        </a:ln>
+      </a:lnStyleLst>
+      <a:effectStyleLst>
+        <a:effectStyle>
+          <a:effectLst/>
+        </a:effectStyle>
+        <a:effectStyle>
+          <a:effectLst/>
+        </a:effectStyle>
+        <a:effectStyle>
+          <a:effectLst>
+            <a:outerShdw blurRad="57150" dist="19050" dir="5400000" algn="ctr" rotWithShape="0">
+              <a:srgbClr val="000000">
+                <a:alpha val="63000"/>
+              </a:srgbClr>
+            </a:outerShdw>
+          </a:effectLst>
+        </a:effectStyle>
+      </a:effectStyleLst>
+      <a:bgFillStyleLst>
+        <a:solidFill>
+          <a:schemeClr val="phClr"/>
+        </a:solidFill>
+        <a:solidFill>
+          <a:schemeClr val="phClr">
+            <a:tint val="95000"/>
+            <a:satMod val="170000"/>
+          </a:schemeClr>
+        </a:solidFill>
+        <a:gradFill rotWithShape="1">
+          <a:gsLst>
+            <a:gs pos="0">
+              <a:schemeClr val="phClr">
+                <a:tint val="93000"/>
+                <a:satMod val="150000"/>
+                <a:shade val="98000"/>
+                <a:lumMod val="102000"/>
+              </a:schemeClr>
+            </a:gs>
+            <a:gs pos="50000">
+              <a:schemeClr val="phClr">
+                <a:tint val="98000"/>
+                <a:satMod val="130000"/>
+                <a:shade val="90000"/>
+                <a:lumMod val="103000"/>
+              </a:schemeClr>
+            </a:gs>
+            <a:gs pos="100000">
+              <a:schemeClr val="phClr">
+                <a:shade val="63000"/>
+                <a:satMod val="120000"/>
+              </a:schemeClr>
+            </a:gs>
+          </a:gsLst>
+          <a:lin ang="5400000" scaled="0"/>
+        </a:gradFill>
+      </a:bgFillStyleLst>
+    </a:fmtScheme>
+  </a:themeElements>
+  <a:objectDefaults/>
+  <a:extraClrSchemeLst/>
+  <a:extLst>
+    <a:ext uri="{05A4C25C-085E-4340-85A3-A5531E510DB2}">
+      <thm15:themeFamily xmlns:thm15="http://schemas.microsoft.com/office/thememl/2012/main" name="Office Theme" id="{62F939B6-93AF-4DB8-9C6B-D6C7DFDC589F}" vid="{4A3C46E8-61CC-4603-A589-7422A47A8E4A}"/>
+    </a:ext>
+  </a:extLst>
+</a:theme>
 </file>
--- a/04_alkalom/Prezentacio/4_alkalom_prezentacio.pptx
+++ b/04_alkalom/Prezentacio/4_alkalom_prezentacio.pptx
@@ -157,7 +157,6 @@
           </a:p>
         </c:rich>
       </c:tx>
-      <c:layout/>
       <c:overlay val="0"/>
     </c:title>
     <c:autoTitleDeleted val="0"/>
@@ -221,7 +220,6 @@
             <c:showLeaderLines val="0"/>
             <c:extLst>
               <c:ext xmlns:c15="http://schemas.microsoft.com/office/drawing/2012/chart" uri="{CE6537A1-D6FC-4f65-9D91-7224C49458BB}">
-                <c15:layout/>
                 <c15:showLeaderLines val="0"/>
               </c:ext>
             </c:extLst>
@@ -805,7 +803,15 @@
           <a:p>
             <a:r>
               <a:rPr lang="en-US" dirty="0"/>
-              <a:t>~45 mp – Kiss Barnabás. Kiegészítő funkciónak egy zárt kört javasolunk: a rendszer vonalkódcímkét nyomtat a hiányzó címkék helyett, a címke kamerával is beolvasható – így olvasó nélkül is lehet leltározni –, a leltár végén pedig hivatalos PDF-jegyzőkönyv készül. A könyvtárakat is kiválasztottuk. Az adatbázisban már előkészítettük: a beolvasás módjai között ott a kamera.</a:t>
+              <a:t>~45 mp – </a:t>
+            </a:r>
+            <a:r>
+              <a:rPr lang="hu-HU" dirty="0"/>
+              <a:t>Bárkányi Máté</a:t>
+            </a:r>
+            <a:r>
+              <a:rPr lang="en-US" dirty="0"/>
+              <a:t>. Kiegészítő funkciónak egy zárt kört javasolunk: a rendszer vonalkódcímkét nyomtat a hiányzó címkék helyett, a címke kamerával is beolvasható – így olvasó nélkül is lehet leltározni –, a leltár végén pedig hivatalos PDF-jegyzőkönyv készül. A könyvtárakat is kiválasztottuk. Az adatbázisban már előkészítettük: a beolvasás módjai között ott a kamera.</a:t>
             </a:r>
           </a:p>
         </p:txBody>
@@ -2185,6 +2191,13 @@
             <a:prstDash val="solid"/>
           </a:ln>
         </p:spPr>
+        <p:txBody>
+          <a:bodyPr/>
+          <a:lstStyle/>
+          <a:p>
+            <a:endParaRPr lang="hu-HU"/>
+          </a:p>
+        </p:txBody>
       </p:sp>
       <p:sp>
         <p:nvSpPr>
@@ -2210,6 +2223,13 @@
             <a:prstDash val="solid"/>
           </a:ln>
         </p:spPr>
+        <p:txBody>
+          <a:bodyPr/>
+          <a:lstStyle/>
+          <a:p>
+            <a:endParaRPr lang="hu-HU"/>
+          </a:p>
+        </p:txBody>
       </p:sp>
       <p:sp>
         <p:nvSpPr>
@@ -2235,6 +2255,13 @@
             <a:prstDash val="solid"/>
           </a:ln>
         </p:spPr>
+        <p:txBody>
+          <a:bodyPr/>
+          <a:lstStyle/>
+          <a:p>
+            <a:endParaRPr lang="hu-HU"/>
+          </a:p>
+        </p:txBody>
       </p:sp>
       <p:sp>
         <p:nvSpPr>
@@ -2260,6 +2287,13 @@
             <a:prstDash val="solid"/>
           </a:ln>
         </p:spPr>
+        <p:txBody>
+          <a:bodyPr/>
+          <a:lstStyle/>
+          <a:p>
+            <a:endParaRPr lang="hu-HU"/>
+          </a:p>
+        </p:txBody>
       </p:sp>
       <p:sp>
         <p:nvSpPr>
@@ -2285,6 +2319,13 @@
             <a:prstDash val="solid"/>
           </a:ln>
         </p:spPr>
+        <p:txBody>
+          <a:bodyPr/>
+          <a:lstStyle/>
+          <a:p>
+            <a:endParaRPr lang="hu-HU"/>
+          </a:p>
+        </p:txBody>
       </p:sp>
       <p:sp>
         <p:nvSpPr>
@@ -2310,6 +2351,13 @@
             <a:prstDash val="solid"/>
           </a:ln>
         </p:spPr>
+        <p:txBody>
+          <a:bodyPr/>
+          <a:lstStyle/>
+          <a:p>
+            <a:endParaRPr lang="hu-HU"/>
+          </a:p>
+        </p:txBody>
       </p:sp>
       <p:sp>
         <p:nvSpPr>
@@ -2335,6 +2383,13 @@
             <a:prstDash val="solid"/>
           </a:ln>
         </p:spPr>
+        <p:txBody>
+          <a:bodyPr/>
+          <a:lstStyle/>
+          <a:p>
+            <a:endParaRPr lang="hu-HU"/>
+          </a:p>
+        </p:txBody>
       </p:sp>
       <p:sp>
         <p:nvSpPr>
@@ -2360,6 +2415,13 @@
             <a:prstDash val="solid"/>
           </a:ln>
         </p:spPr>
+        <p:txBody>
+          <a:bodyPr/>
+          <a:lstStyle/>
+          <a:p>
+            <a:endParaRPr lang="hu-HU"/>
+          </a:p>
+        </p:txBody>
       </p:sp>
       <p:sp>
         <p:nvSpPr>
@@ -2385,6 +2447,13 @@
             <a:prstDash val="solid"/>
           </a:ln>
         </p:spPr>
+        <p:txBody>
+          <a:bodyPr/>
+          <a:lstStyle/>
+          <a:p>
+            <a:endParaRPr lang="hu-HU"/>
+          </a:p>
+        </p:txBody>
       </p:sp>
       <p:sp>
         <p:nvSpPr>
@@ -2410,6 +2479,13 @@
             <a:prstDash val="solid"/>
           </a:ln>
         </p:spPr>
+        <p:txBody>
+          <a:bodyPr/>
+          <a:lstStyle/>
+          <a:p>
+            <a:endParaRPr lang="hu-HU"/>
+          </a:p>
+        </p:txBody>
       </p:sp>
       <p:sp>
         <p:nvSpPr>
@@ -2435,6 +2511,13 @@
             <a:prstDash val="solid"/>
           </a:ln>
         </p:spPr>
+        <p:txBody>
+          <a:bodyPr/>
+          <a:lstStyle/>
+          <a:p>
+            <a:endParaRPr lang="hu-HU"/>
+          </a:p>
+        </p:txBody>
       </p:sp>
       <p:sp>
         <p:nvSpPr>
@@ -2460,6 +2543,13 @@
             <a:prstDash val="solid"/>
           </a:ln>
         </p:spPr>
+        <p:txBody>
+          <a:bodyPr/>
+          <a:lstStyle/>
+          <a:p>
+            <a:endParaRPr lang="hu-HU"/>
+          </a:p>
+        </p:txBody>
       </p:sp>
       <p:sp>
         <p:nvSpPr>
@@ -2485,6 +2575,13 @@
             <a:prstDash val="solid"/>
           </a:ln>
         </p:spPr>
+        <p:txBody>
+          <a:bodyPr/>
+          <a:lstStyle/>
+          <a:p>
+            <a:endParaRPr lang="hu-HU"/>
+          </a:p>
+        </p:txBody>
       </p:sp>
       <p:sp>
         <p:nvSpPr>
@@ -2510,6 +2607,13 @@
             <a:prstDash val="solid"/>
           </a:ln>
         </p:spPr>
+        <p:txBody>
+          <a:bodyPr/>
+          <a:lstStyle/>
+          <a:p>
+            <a:endParaRPr lang="hu-HU"/>
+          </a:p>
+        </p:txBody>
       </p:sp>
       <p:sp>
         <p:nvSpPr>
@@ -2535,6 +2639,13 @@
             <a:prstDash val="solid"/>
           </a:ln>
         </p:spPr>
+        <p:txBody>
+          <a:bodyPr/>
+          <a:lstStyle/>
+          <a:p>
+            <a:endParaRPr lang="hu-HU"/>
+          </a:p>
+        </p:txBody>
       </p:sp>
       <p:sp>
         <p:nvSpPr>
@@ -2560,6 +2671,13 @@
             <a:prstDash val="solid"/>
           </a:ln>
         </p:spPr>
+        <p:txBody>
+          <a:bodyPr/>
+          <a:lstStyle/>
+          <a:p>
+            <a:endParaRPr lang="hu-HU"/>
+          </a:p>
+        </p:txBody>
       </p:sp>
       <p:sp>
         <p:nvSpPr>
@@ -2624,6 +2742,13 @@
             <a:prstDash val="solid"/>
           </a:ln>
         </p:spPr>
+        <p:txBody>
+          <a:bodyPr/>
+          <a:lstStyle/>
+          <a:p>
+            <a:endParaRPr lang="hu-HU"/>
+          </a:p>
+        </p:txBody>
       </p:sp>
       <p:sp>
         <p:nvSpPr>
@@ -2762,6 +2887,13 @@
             <a:prstDash val="solid"/>
           </a:ln>
         </p:spPr>
+        <p:txBody>
+          <a:bodyPr/>
+          <a:lstStyle/>
+          <a:p>
+            <a:endParaRPr lang="hu-HU"/>
+          </a:p>
+        </p:txBody>
       </p:sp>
       <p:sp>
         <p:nvSpPr>
@@ -2787,6 +2919,13 @@
             <a:prstDash val="solid"/>
           </a:ln>
         </p:spPr>
+        <p:txBody>
+          <a:bodyPr/>
+          <a:lstStyle/>
+          <a:p>
+            <a:endParaRPr lang="hu-HU"/>
+          </a:p>
+        </p:txBody>
       </p:sp>
       <p:pic>
         <p:nvPicPr>
@@ -2874,6 +3013,13 @@
             <a:tailEnd type="triangle"/>
           </a:ln>
         </p:spPr>
+        <p:txBody>
+          <a:bodyPr/>
+          <a:lstStyle/>
+          <a:p>
+            <a:endParaRPr lang="hu-HU"/>
+          </a:p>
+        </p:txBody>
       </p:sp>
       <p:sp>
         <p:nvSpPr>
@@ -2901,6 +3047,13 @@
             <a:prstDash val="solid"/>
           </a:ln>
         </p:spPr>
+        <p:txBody>
+          <a:bodyPr/>
+          <a:lstStyle/>
+          <a:p>
+            <a:endParaRPr lang="hu-HU"/>
+          </a:p>
+        </p:txBody>
       </p:sp>
       <p:sp>
         <p:nvSpPr>
@@ -2926,6 +3079,13 @@
             <a:prstDash val="solid"/>
           </a:ln>
         </p:spPr>
+        <p:txBody>
+          <a:bodyPr/>
+          <a:lstStyle/>
+          <a:p>
+            <a:endParaRPr lang="hu-HU"/>
+          </a:p>
+        </p:txBody>
       </p:sp>
       <p:pic>
         <p:nvPicPr>
@@ -3013,6 +3173,13 @@
             <a:tailEnd type="triangle"/>
           </a:ln>
         </p:spPr>
+        <p:txBody>
+          <a:bodyPr/>
+          <a:lstStyle/>
+          <a:p>
+            <a:endParaRPr lang="hu-HU"/>
+          </a:p>
+        </p:txBody>
       </p:sp>
       <p:sp>
         <p:nvSpPr>
@@ -3040,6 +3207,13 @@
             <a:prstDash val="solid"/>
           </a:ln>
         </p:spPr>
+        <p:txBody>
+          <a:bodyPr/>
+          <a:lstStyle/>
+          <a:p>
+            <a:endParaRPr lang="hu-HU"/>
+          </a:p>
+        </p:txBody>
       </p:sp>
       <p:sp>
         <p:nvSpPr>
@@ -3065,6 +3239,13 @@
             <a:prstDash val="solid"/>
           </a:ln>
         </p:spPr>
+        <p:txBody>
+          <a:bodyPr/>
+          <a:lstStyle/>
+          <a:p>
+            <a:endParaRPr lang="hu-HU"/>
+          </a:p>
+        </p:txBody>
       </p:sp>
       <p:pic>
         <p:nvPicPr>
@@ -3152,6 +3333,13 @@
             <a:tailEnd type="triangle"/>
           </a:ln>
         </p:spPr>
+        <p:txBody>
+          <a:bodyPr/>
+          <a:lstStyle/>
+          <a:p>
+            <a:endParaRPr lang="hu-HU"/>
+          </a:p>
+        </p:txBody>
       </p:sp>
       <p:sp>
         <p:nvSpPr>
@@ -3179,6 +3367,13 @@
             <a:prstDash val="solid"/>
           </a:ln>
         </p:spPr>
+        <p:txBody>
+          <a:bodyPr/>
+          <a:lstStyle/>
+          <a:p>
+            <a:endParaRPr lang="hu-HU"/>
+          </a:p>
+        </p:txBody>
       </p:sp>
       <p:sp>
         <p:nvSpPr>
@@ -3204,6 +3399,13 @@
             <a:prstDash val="solid"/>
           </a:ln>
         </p:spPr>
+        <p:txBody>
+          <a:bodyPr/>
+          <a:lstStyle/>
+          <a:p>
+            <a:endParaRPr lang="hu-HU"/>
+          </a:p>
+        </p:txBody>
       </p:sp>
       <p:pic>
         <p:nvPicPr>
@@ -3294,6 +3496,13 @@
             <a:prstDash val="solid"/>
           </a:ln>
         </p:spPr>
+        <p:txBody>
+          <a:bodyPr/>
+          <a:lstStyle/>
+          <a:p>
+            <a:endParaRPr lang="hu-HU"/>
+          </a:p>
+        </p:txBody>
       </p:sp>
       <p:sp>
         <p:nvSpPr>
@@ -3438,6 +3647,13 @@
             <a:prstDash val="solid"/>
           </a:ln>
         </p:spPr>
+        <p:txBody>
+          <a:bodyPr/>
+          <a:lstStyle/>
+          <a:p>
+            <a:endParaRPr lang="hu-HU"/>
+          </a:p>
+        </p:txBody>
       </p:sp>
       <p:sp>
         <p:nvSpPr>
@@ -3582,6 +3798,13 @@
             <a:prstDash val="solid"/>
           </a:ln>
         </p:spPr>
+        <p:txBody>
+          <a:bodyPr/>
+          <a:lstStyle/>
+          <a:p>
+            <a:endParaRPr lang="hu-HU"/>
+          </a:p>
+        </p:txBody>
       </p:sp>
       <p:sp>
         <p:nvSpPr>
@@ -4214,6 +4437,13 @@
             <a:prstDash val="solid"/>
           </a:ln>
         </p:spPr>
+        <p:txBody>
+          <a:bodyPr/>
+          <a:lstStyle/>
+          <a:p>
+            <a:endParaRPr lang="hu-HU"/>
+          </a:p>
+        </p:txBody>
       </p:sp>
       <p:sp>
         <p:nvSpPr>
@@ -4239,6 +4469,13 @@
             <a:prstDash val="solid"/>
           </a:ln>
         </p:spPr>
+        <p:txBody>
+          <a:bodyPr/>
+          <a:lstStyle/>
+          <a:p>
+            <a:endParaRPr lang="hu-HU"/>
+          </a:p>
+        </p:txBody>
       </p:sp>
       <p:pic>
         <p:nvPicPr>
@@ -4404,6 +4641,13 @@
             <a:tailEnd type="triangle"/>
           </a:ln>
         </p:spPr>
+        <p:txBody>
+          <a:bodyPr/>
+          <a:lstStyle/>
+          <a:p>
+            <a:endParaRPr lang="hu-HU"/>
+          </a:p>
+        </p:txBody>
       </p:sp>
       <p:sp>
         <p:nvSpPr>
@@ -4431,6 +4675,13 @@
             <a:prstDash val="solid"/>
           </a:ln>
         </p:spPr>
+        <p:txBody>
+          <a:bodyPr/>
+          <a:lstStyle/>
+          <a:p>
+            <a:endParaRPr lang="hu-HU"/>
+          </a:p>
+        </p:txBody>
       </p:sp>
       <p:sp>
         <p:nvSpPr>
@@ -4456,6 +4707,13 @@
             <a:prstDash val="solid"/>
           </a:ln>
         </p:spPr>
+        <p:txBody>
+          <a:bodyPr/>
+          <a:lstStyle/>
+          <a:p>
+            <a:endParaRPr lang="hu-HU"/>
+          </a:p>
+        </p:txBody>
       </p:sp>
       <p:pic>
         <p:nvPicPr>
@@ -4621,6 +4879,13 @@
             <a:tailEnd type="triangle"/>
           </a:ln>
         </p:spPr>
+        <p:txBody>
+          <a:bodyPr/>
+          <a:lstStyle/>
+          <a:p>
+            <a:endParaRPr lang="hu-HU"/>
+          </a:p>
+        </p:txBody>
       </p:sp>
       <p:sp>
         <p:nvSpPr>
@@ -4648,6 +4913,13 @@
             <a:prstDash val="solid"/>
           </a:ln>
         </p:spPr>
+        <p:txBody>
+          <a:bodyPr/>
+          <a:lstStyle/>
+          <a:p>
+            <a:endParaRPr lang="hu-HU"/>
+          </a:p>
+        </p:txBody>
       </p:sp>
       <p:sp>
         <p:nvSpPr>
@@ -4673,6 +4945,13 @@
             <a:prstDash val="solid"/>
           </a:ln>
         </p:spPr>
+        <p:txBody>
+          <a:bodyPr/>
+          <a:lstStyle/>
+          <a:p>
+            <a:endParaRPr lang="hu-HU"/>
+          </a:p>
+        </p:txBody>
       </p:sp>
       <p:pic>
         <p:nvPicPr>
@@ -4991,6 +5270,13 @@
             <a:prstDash val="solid"/>
           </a:ln>
         </p:spPr>
+        <p:txBody>
+          <a:bodyPr/>
+          <a:lstStyle/>
+          <a:p>
+            <a:endParaRPr lang="hu-HU"/>
+          </a:p>
+        </p:txBody>
       </p:sp>
       <p:sp>
         <p:nvSpPr>
@@ -5016,6 +5302,13 @@
             <a:prstDash val="solid"/>
           </a:ln>
         </p:spPr>
+        <p:txBody>
+          <a:bodyPr/>
+          <a:lstStyle/>
+          <a:p>
+            <a:endParaRPr lang="hu-HU"/>
+          </a:p>
+        </p:txBody>
       </p:sp>
       <p:sp>
         <p:nvSpPr>
@@ -5160,6 +5453,13 @@
             <a:prstDash val="solid"/>
           </a:ln>
         </p:spPr>
+        <p:txBody>
+          <a:bodyPr/>
+          <a:lstStyle/>
+          <a:p>
+            <a:endParaRPr lang="hu-HU"/>
+          </a:p>
+        </p:txBody>
       </p:sp>
       <p:sp>
         <p:nvSpPr>
@@ -5185,6 +5485,13 @@
             <a:prstDash val="solid"/>
           </a:ln>
         </p:spPr>
+        <p:txBody>
+          <a:bodyPr/>
+          <a:lstStyle/>
+          <a:p>
+            <a:endParaRPr lang="hu-HU"/>
+          </a:p>
+        </p:txBody>
       </p:sp>
       <p:sp>
         <p:nvSpPr>
@@ -5329,6 +5636,13 @@
             <a:prstDash val="solid"/>
           </a:ln>
         </p:spPr>
+        <p:txBody>
+          <a:bodyPr/>
+          <a:lstStyle/>
+          <a:p>
+            <a:endParaRPr lang="hu-HU"/>
+          </a:p>
+        </p:txBody>
       </p:sp>
       <p:sp>
         <p:nvSpPr>
@@ -5354,6 +5668,13 @@
             <a:prstDash val="solid"/>
           </a:ln>
         </p:spPr>
+        <p:txBody>
+          <a:bodyPr/>
+          <a:lstStyle/>
+          <a:p>
+            <a:endParaRPr lang="hu-HU"/>
+          </a:p>
+        </p:txBody>
       </p:sp>
       <p:sp>
         <p:nvSpPr>
@@ -5857,6 +6178,13 @@
             <a:prstDash val="solid"/>
           </a:ln>
         </p:spPr>
+        <p:txBody>
+          <a:bodyPr/>
+          <a:lstStyle/>
+          <a:p>
+            <a:endParaRPr lang="hu-HU"/>
+          </a:p>
+        </p:txBody>
       </p:sp>
       <p:sp>
         <p:nvSpPr>
@@ -5882,6 +6210,13 @@
             <a:prstDash val="solid"/>
           </a:ln>
         </p:spPr>
+        <p:txBody>
+          <a:bodyPr/>
+          <a:lstStyle/>
+          <a:p>
+            <a:endParaRPr lang="hu-HU"/>
+          </a:p>
+        </p:txBody>
       </p:sp>
       <p:pic>
         <p:nvPicPr>
@@ -6011,6 +6346,13 @@
             <a:prstDash val="solid"/>
           </a:ln>
         </p:spPr>
+        <p:txBody>
+          <a:bodyPr/>
+          <a:lstStyle/>
+          <a:p>
+            <a:endParaRPr lang="hu-HU"/>
+          </a:p>
+        </p:txBody>
       </p:sp>
       <p:sp>
         <p:nvSpPr>
@@ -6036,6 +6378,13 @@
             <a:prstDash val="solid"/>
           </a:ln>
         </p:spPr>
+        <p:txBody>
+          <a:bodyPr/>
+          <a:lstStyle/>
+          <a:p>
+            <a:endParaRPr lang="hu-HU"/>
+          </a:p>
+        </p:txBody>
       </p:sp>
       <p:pic>
         <p:nvPicPr>
@@ -6165,6 +6514,13 @@
             <a:prstDash val="solid"/>
           </a:ln>
         </p:spPr>
+        <p:txBody>
+          <a:bodyPr/>
+          <a:lstStyle/>
+          <a:p>
+            <a:endParaRPr lang="hu-HU"/>
+          </a:p>
+        </p:txBody>
       </p:sp>
       <p:sp>
         <p:nvSpPr>
@@ -6190,6 +6546,13 @@
             <a:prstDash val="solid"/>
           </a:ln>
         </p:spPr>
+        <p:txBody>
+          <a:bodyPr/>
+          <a:lstStyle/>
+          <a:p>
+            <a:endParaRPr lang="hu-HU"/>
+          </a:p>
+        </p:txBody>
       </p:sp>
       <p:pic>
         <p:nvPicPr>
@@ -6319,6 +6682,13 @@
             <a:prstDash val="solid"/>
           </a:ln>
         </p:spPr>
+        <p:txBody>
+          <a:bodyPr/>
+          <a:lstStyle/>
+          <a:p>
+            <a:endParaRPr lang="hu-HU"/>
+          </a:p>
+        </p:txBody>
       </p:sp>
       <p:sp>
         <p:nvSpPr>
@@ -6344,6 +6714,13 @@
             <a:prstDash val="solid"/>
           </a:ln>
         </p:spPr>
+        <p:txBody>
+          <a:bodyPr/>
+          <a:lstStyle/>
+          <a:p>
+            <a:endParaRPr lang="hu-HU"/>
+          </a:p>
+        </p:txBody>
       </p:sp>
       <p:pic>
         <p:nvPicPr>
@@ -6582,6 +6959,13 @@
             <a:prstDash val="solid"/>
           </a:ln>
         </p:spPr>
+        <p:txBody>
+          <a:bodyPr/>
+          <a:lstStyle/>
+          <a:p>
+            <a:endParaRPr lang="hu-HU"/>
+          </a:p>
+        </p:txBody>
       </p:sp>
       <p:pic>
         <p:nvPicPr>
@@ -6709,6 +7093,13 @@
             <a:prstDash val="solid"/>
           </a:ln>
         </p:spPr>
+        <p:txBody>
+          <a:bodyPr/>
+          <a:lstStyle/>
+          <a:p>
+            <a:endParaRPr lang="hu-HU"/>
+          </a:p>
+        </p:txBody>
       </p:sp>
       <p:pic>
         <p:nvPicPr>
@@ -6836,6 +7227,13 @@
             <a:prstDash val="solid"/>
           </a:ln>
         </p:spPr>
+        <p:txBody>
+          <a:bodyPr/>
+          <a:lstStyle/>
+          <a:p>
+            <a:endParaRPr lang="hu-HU"/>
+          </a:p>
+        </p:txBody>
       </p:sp>
       <p:pic>
         <p:nvPicPr>
@@ -6963,6 +7361,13 @@
             <a:prstDash val="solid"/>
           </a:ln>
         </p:spPr>
+        <p:txBody>
+          <a:bodyPr/>
+          <a:lstStyle/>
+          <a:p>
+            <a:endParaRPr lang="hu-HU"/>
+          </a:p>
+        </p:txBody>
       </p:sp>
       <p:pic>
         <p:nvPicPr>
@@ -7090,6 +7495,13 @@
             <a:prstDash val="solid"/>
           </a:ln>
         </p:spPr>
+        <p:txBody>
+          <a:bodyPr/>
+          <a:lstStyle/>
+          <a:p>
+            <a:endParaRPr lang="hu-HU"/>
+          </a:p>
+        </p:txBody>
       </p:sp>
       <p:pic>
         <p:nvPicPr>
@@ -7219,6 +7631,13 @@
             <a:prstDash val="solid"/>
           </a:ln>
         </p:spPr>
+        <p:txBody>
+          <a:bodyPr/>
+          <a:lstStyle/>
+          <a:p>
+            <a:endParaRPr lang="hu-HU"/>
+          </a:p>
+        </p:txBody>
       </p:sp>
       <p:sp>
         <p:nvSpPr>
@@ -7472,6 +7891,13 @@
             <a:prstDash val="solid"/>
           </a:ln>
         </p:spPr>
+        <p:txBody>
+          <a:bodyPr/>
+          <a:lstStyle/>
+          <a:p>
+            <a:endParaRPr lang="hu-HU"/>
+          </a:p>
+        </p:txBody>
       </p:sp>
       <p:pic>
         <p:nvPicPr>
@@ -7599,6 +8025,13 @@
             <a:prstDash val="solid"/>
           </a:ln>
         </p:spPr>
+        <p:txBody>
+          <a:bodyPr/>
+          <a:lstStyle/>
+          <a:p>
+            <a:endParaRPr lang="hu-HU"/>
+          </a:p>
+        </p:txBody>
       </p:sp>
       <p:pic>
         <p:nvPicPr>
@@ -7726,6 +8159,13 @@
             <a:prstDash val="solid"/>
           </a:ln>
         </p:spPr>
+        <p:txBody>
+          <a:bodyPr/>
+          <a:lstStyle/>
+          <a:p>
+            <a:endParaRPr lang="hu-HU"/>
+          </a:p>
+        </p:txBody>
       </p:sp>
       <p:pic>
         <p:nvPicPr>
@@ -7853,6 +8293,13 @@
             <a:prstDash val="solid"/>
           </a:ln>
         </p:spPr>
+        <p:txBody>
+          <a:bodyPr/>
+          <a:lstStyle/>
+          <a:p>
+            <a:endParaRPr lang="hu-HU"/>
+          </a:p>
+        </p:txBody>
       </p:sp>
       <p:pic>
         <p:nvPicPr>
@@ -8017,6 +8464,13 @@
             <a:prstDash val="solid"/>
           </a:ln>
         </p:spPr>
+        <p:txBody>
+          <a:bodyPr/>
+          <a:lstStyle/>
+          <a:p>
+            <a:endParaRPr lang="hu-HU"/>
+          </a:p>
+        </p:txBody>
       </p:sp>
       <p:sp>
         <p:nvSpPr>
@@ -8042,6 +8496,13 @@
             <a:prstDash val="solid"/>
           </a:ln>
         </p:spPr>
+        <p:txBody>
+          <a:bodyPr/>
+          <a:lstStyle/>
+          <a:p>
+            <a:endParaRPr lang="hu-HU"/>
+          </a:p>
+        </p:txBody>
       </p:sp>
       <p:sp>
         <p:nvSpPr>
@@ -8156,6 +8617,13 @@
             <a:prstDash val="solid"/>
           </a:ln>
         </p:spPr>
+        <p:txBody>
+          <a:bodyPr/>
+          <a:lstStyle/>
+          <a:p>
+            <a:endParaRPr lang="hu-HU"/>
+          </a:p>
+        </p:txBody>
       </p:sp>
       <p:sp>
         <p:nvSpPr>
@@ -8270,6 +8738,13 @@
             <a:prstDash val="solid"/>
           </a:ln>
         </p:spPr>
+        <p:txBody>
+          <a:bodyPr/>
+          <a:lstStyle/>
+          <a:p>
+            <a:endParaRPr lang="hu-HU"/>
+          </a:p>
+        </p:txBody>
       </p:sp>
       <p:sp>
         <p:nvSpPr>
@@ -8384,6 +8859,13 @@
             <a:prstDash val="solid"/>
           </a:ln>
         </p:spPr>
+        <p:txBody>
+          <a:bodyPr/>
+          <a:lstStyle/>
+          <a:p>
+            <a:endParaRPr lang="hu-HU"/>
+          </a:p>
+        </p:txBody>
       </p:sp>
       <p:sp>
         <p:nvSpPr>
@@ -8498,6 +8980,13 @@
             <a:prstDash val="solid"/>
           </a:ln>
         </p:spPr>
+        <p:txBody>
+          <a:bodyPr/>
+          <a:lstStyle/>
+          <a:p>
+            <a:endParaRPr lang="hu-HU"/>
+          </a:p>
+        </p:txBody>
       </p:sp>
       <p:sp>
         <p:nvSpPr>
@@ -8612,6 +9101,13 @@
             <a:prstDash val="solid"/>
           </a:ln>
         </p:spPr>
+        <p:txBody>
+          <a:bodyPr/>
+          <a:lstStyle/>
+          <a:p>
+            <a:endParaRPr lang="hu-HU"/>
+          </a:p>
+        </p:txBody>
       </p:sp>
       <p:sp>
         <p:nvSpPr>
@@ -8917,6 +9413,13 @@
             <a:prstDash val="solid"/>
           </a:ln>
         </p:spPr>
+        <p:txBody>
+          <a:bodyPr/>
+          <a:lstStyle/>
+          <a:p>
+            <a:endParaRPr lang="hu-HU"/>
+          </a:p>
+        </p:txBody>
       </p:sp>
       <p:sp>
         <p:nvSpPr>
@@ -9022,6 +9525,13 @@
             <a:prstDash val="solid"/>
           </a:ln>
         </p:spPr>
+        <p:txBody>
+          <a:bodyPr/>
+          <a:lstStyle/>
+          <a:p>
+            <a:endParaRPr lang="hu-HU"/>
+          </a:p>
+        </p:txBody>
       </p:sp>
       <p:sp>
         <p:nvSpPr>
@@ -9047,6 +9557,13 @@
             <a:prstDash val="solid"/>
           </a:ln>
         </p:spPr>
+        <p:txBody>
+          <a:bodyPr/>
+          <a:lstStyle/>
+          <a:p>
+            <a:endParaRPr lang="hu-HU"/>
+          </a:p>
+        </p:txBody>
       </p:sp>
       <p:pic>
         <p:nvPicPr>
@@ -9221,6 +9738,13 @@
             <a:prstDash val="solid"/>
           </a:ln>
         </p:spPr>
+        <p:txBody>
+          <a:bodyPr/>
+          <a:lstStyle/>
+          <a:p>
+            <a:endParaRPr lang="hu-HU"/>
+          </a:p>
+        </p:txBody>
       </p:sp>
       <p:sp>
         <p:nvSpPr>
@@ -9246,6 +9770,13 @@
             <a:prstDash val="solid"/>
           </a:ln>
         </p:spPr>
+        <p:txBody>
+          <a:bodyPr/>
+          <a:lstStyle/>
+          <a:p>
+            <a:endParaRPr lang="hu-HU"/>
+          </a:p>
+        </p:txBody>
       </p:sp>
       <p:pic>
         <p:nvPicPr>
@@ -9375,6 +9906,13 @@
             <a:prstDash val="solid"/>
           </a:ln>
         </p:spPr>
+        <p:txBody>
+          <a:bodyPr/>
+          <a:lstStyle/>
+          <a:p>
+            <a:endParaRPr lang="hu-HU"/>
+          </a:p>
+        </p:txBody>
       </p:sp>
       <p:sp>
         <p:nvSpPr>
@@ -9400,6 +9938,13 @@
             <a:prstDash val="solid"/>
           </a:ln>
         </p:spPr>
+        <p:txBody>
+          <a:bodyPr/>
+          <a:lstStyle/>
+          <a:p>
+            <a:endParaRPr lang="hu-HU"/>
+          </a:p>
+        </p:txBody>
       </p:sp>
       <p:pic>
         <p:nvPicPr>
@@ -9529,6 +10074,13 @@
             <a:prstDash val="solid"/>
           </a:ln>
         </p:spPr>
+        <p:txBody>
+          <a:bodyPr/>
+          <a:lstStyle/>
+          <a:p>
+            <a:endParaRPr lang="hu-HU"/>
+          </a:p>
+        </p:txBody>
       </p:sp>
       <p:sp>
         <p:nvSpPr>
@@ -9554,6 +10106,13 @@
             <a:prstDash val="solid"/>
           </a:ln>
         </p:spPr>
+        <p:txBody>
+          <a:bodyPr/>
+          <a:lstStyle/>
+          <a:p>
+            <a:endParaRPr lang="hu-HU"/>
+          </a:p>
+        </p:txBody>
       </p:sp>
       <p:pic>
         <p:nvPicPr>
@@ -9683,6 +10242,13 @@
             <a:prstDash val="solid"/>
           </a:ln>
         </p:spPr>
+        <p:txBody>
+          <a:bodyPr/>
+          <a:lstStyle/>
+          <a:p>
+            <a:endParaRPr lang="hu-HU"/>
+          </a:p>
+        </p:txBody>
       </p:sp>
       <p:sp>
         <p:nvSpPr>
@@ -9708,6 +10274,13 @@
             <a:prstDash val="solid"/>
           </a:ln>
         </p:spPr>
+        <p:txBody>
+          <a:bodyPr/>
+          <a:lstStyle/>
+          <a:p>
+            <a:endParaRPr lang="hu-HU"/>
+          </a:p>
+        </p:txBody>
       </p:sp>
       <p:pic>
         <p:nvPicPr>
@@ -9837,6 +10410,13 @@
             <a:prstDash val="solid"/>
           </a:ln>
         </p:spPr>
+        <p:txBody>
+          <a:bodyPr/>
+          <a:lstStyle/>
+          <a:p>
+            <a:endParaRPr lang="hu-HU"/>
+          </a:p>
+        </p:txBody>
       </p:sp>
       <p:sp>
         <p:nvSpPr>
@@ -9862,6 +10442,13 @@
             <a:prstDash val="solid"/>
           </a:ln>
         </p:spPr>
+        <p:txBody>
+          <a:bodyPr/>
+          <a:lstStyle/>
+          <a:p>
+            <a:endParaRPr lang="hu-HU"/>
+          </a:p>
+        </p:txBody>
       </p:sp>
       <p:pic>
         <p:nvPicPr>
@@ -10102,6 +10689,13 @@
             <a:prstDash val="solid"/>
           </a:ln>
         </p:spPr>
+        <p:txBody>
+          <a:bodyPr/>
+          <a:lstStyle/>
+          <a:p>
+            <a:endParaRPr lang="hu-HU"/>
+          </a:p>
+        </p:txBody>
       </p:sp>
       <p:sp>
         <p:nvSpPr>
@@ -10127,6 +10721,13 @@
             <a:prstDash val="solid"/>
           </a:ln>
         </p:spPr>
+        <p:txBody>
+          <a:bodyPr/>
+          <a:lstStyle/>
+          <a:p>
+            <a:endParaRPr lang="hu-HU"/>
+          </a:p>
+        </p:txBody>
       </p:sp>
       <p:pic>
         <p:nvPicPr>
@@ -10302,6 +10903,13 @@
             <a:prstDash val="solid"/>
           </a:ln>
         </p:spPr>
+        <p:txBody>
+          <a:bodyPr/>
+          <a:lstStyle/>
+          <a:p>
+            <a:endParaRPr lang="hu-HU"/>
+          </a:p>
+        </p:txBody>
       </p:sp>
       <p:sp>
         <p:nvSpPr>
@@ -10327,6 +10935,13 @@
             <a:prstDash val="solid"/>
           </a:ln>
         </p:spPr>
+        <p:txBody>
+          <a:bodyPr/>
+          <a:lstStyle/>
+          <a:p>
+            <a:endParaRPr lang="hu-HU"/>
+          </a:p>
+        </p:txBody>
       </p:sp>
       <p:pic>
         <p:nvPicPr>
@@ -10502,6 +11117,13 @@
             <a:prstDash val="solid"/>
           </a:ln>
         </p:spPr>
+        <p:txBody>
+          <a:bodyPr/>
+          <a:lstStyle/>
+          <a:p>
+            <a:endParaRPr lang="hu-HU"/>
+          </a:p>
+        </p:txBody>
       </p:sp>
       <p:sp>
         <p:nvSpPr>
@@ -10527,6 +11149,13 @@
             <a:prstDash val="solid"/>
           </a:ln>
         </p:spPr>
+        <p:txBody>
+          <a:bodyPr/>
+          <a:lstStyle/>
+          <a:p>
+            <a:endParaRPr lang="hu-HU"/>
+          </a:p>
+        </p:txBody>
       </p:sp>
       <p:pic>
         <p:nvPicPr>
@@ -10700,6 +11329,13 @@
             <a:tailEnd type="triangle"/>
           </a:ln>
         </p:spPr>
+        <p:txBody>
+          <a:bodyPr/>
+          <a:lstStyle/>
+          <a:p>
+            <a:endParaRPr lang="hu-HU"/>
+          </a:p>
+        </p:txBody>
       </p:sp>
       <p:sp>
         <p:nvSpPr>
@@ -10781,6 +11417,13 @@
             <a:tailEnd type="triangle"/>
           </a:ln>
         </p:spPr>
+        <p:txBody>
+          <a:bodyPr/>
+          <a:lstStyle/>
+          <a:p>
+            <a:endParaRPr lang="hu-HU"/>
+          </a:p>
+        </p:txBody>
       </p:sp>
       <p:sp>
         <p:nvSpPr>
@@ -10847,6 +11490,13 @@
             <a:prstDash val="solid"/>
           </a:ln>
         </p:spPr>
+        <p:txBody>
+          <a:bodyPr/>
+          <a:lstStyle/>
+          <a:p>
+            <a:endParaRPr lang="hu-HU"/>
+          </a:p>
+        </p:txBody>
       </p:sp>
       <p:sp>
         <p:nvSpPr>
@@ -10924,6 +11574,13 @@
             <a:prstDash val="solid"/>
           </a:ln>
         </p:spPr>
+        <p:txBody>
+          <a:bodyPr/>
+          <a:lstStyle/>
+          <a:p>
+            <a:endParaRPr lang="hu-HU"/>
+          </a:p>
+        </p:txBody>
       </p:sp>
       <p:sp>
         <p:nvSpPr>
@@ -11151,6 +11808,13 @@
             <a:prstDash val="solid"/>
           </a:ln>
         </p:spPr>
+        <p:txBody>
+          <a:bodyPr/>
+          <a:lstStyle/>
+          <a:p>
+            <a:endParaRPr lang="hu-HU"/>
+          </a:p>
+        </p:txBody>
       </p:sp>
       <p:sp>
         <p:nvSpPr>
@@ -11256,6 +11920,13 @@
             <a:prstDash val="solid"/>
           </a:ln>
         </p:spPr>
+        <p:txBody>
+          <a:bodyPr/>
+          <a:lstStyle/>
+          <a:p>
+            <a:endParaRPr lang="hu-HU"/>
+          </a:p>
+        </p:txBody>
       </p:sp>
       <p:sp>
         <p:nvSpPr>
@@ -11361,6 +12032,13 @@
             <a:prstDash val="solid"/>
           </a:ln>
         </p:spPr>
+        <p:txBody>
+          <a:bodyPr/>
+          <a:lstStyle/>
+          <a:p>
+            <a:endParaRPr lang="hu-HU"/>
+          </a:p>
+        </p:txBody>
       </p:sp>
       <p:sp>
         <p:nvSpPr>
@@ -11466,6 +12144,13 @@
             <a:prstDash val="solid"/>
           </a:ln>
         </p:spPr>
+        <p:txBody>
+          <a:bodyPr/>
+          <a:lstStyle/>
+          <a:p>
+            <a:endParaRPr lang="hu-HU"/>
+          </a:p>
+        </p:txBody>
       </p:sp>
       <p:sp>
         <p:nvSpPr>
@@ -11656,6 +12341,13 @@
             <a:prstDash val="solid"/>
           </a:ln>
         </p:spPr>
+        <p:txBody>
+          <a:bodyPr/>
+          <a:lstStyle/>
+          <a:p>
+            <a:endParaRPr lang="hu-HU"/>
+          </a:p>
+        </p:txBody>
       </p:sp>
       <p:sp>
         <p:nvSpPr>
@@ -12028,6 +12720,13 @@
             <a:prstDash val="solid"/>
           </a:ln>
         </p:spPr>
+        <p:txBody>
+          <a:bodyPr/>
+          <a:lstStyle/>
+          <a:p>
+            <a:endParaRPr lang="hu-HU"/>
+          </a:p>
+        </p:txBody>
       </p:sp>
       <p:sp>
         <p:nvSpPr>
@@ -12172,6 +12871,13 @@
             <a:prstDash val="solid"/>
           </a:ln>
         </p:spPr>
+        <p:txBody>
+          <a:bodyPr/>
+          <a:lstStyle/>
+          <a:p>
+            <a:endParaRPr lang="hu-HU"/>
+          </a:p>
+        </p:txBody>
       </p:sp>
       <p:sp>
         <p:nvSpPr>
@@ -12316,6 +13022,13 @@
             <a:prstDash val="solid"/>
           </a:ln>
         </p:spPr>
+        <p:txBody>
+          <a:bodyPr/>
+          <a:lstStyle/>
+          <a:p>
+            <a:endParaRPr lang="hu-HU"/>
+          </a:p>
+        </p:txBody>
       </p:sp>
       <p:sp>
         <p:nvSpPr>
@@ -12460,6 +13173,13 @@
             <a:prstDash val="solid"/>
           </a:ln>
         </p:spPr>
+        <p:txBody>
+          <a:bodyPr/>
+          <a:lstStyle/>
+          <a:p>
+            <a:endParaRPr lang="hu-HU"/>
+          </a:p>
+        </p:txBody>
       </p:sp>
       <p:sp>
         <p:nvSpPr>
@@ -12604,6 +13324,13 @@
             <a:prstDash val="solid"/>
           </a:ln>
         </p:spPr>
+        <p:txBody>
+          <a:bodyPr/>
+          <a:lstStyle/>
+          <a:p>
+            <a:endParaRPr lang="hu-HU"/>
+          </a:p>
+        </p:txBody>
       </p:sp>
       <p:sp>
         <p:nvSpPr>
@@ -12801,18 +13528,19 @@
                 <a:ea typeface="Calibri" pitchFamily="34" charset="-122"/>
                 <a:cs typeface="Calibri" pitchFamily="34" charset="-120"/>
               </a:rPr>
-              <a:t>Egységes, szabványos hibaválasz</a:t>
-            </a:r>
-            <a:endParaRPr lang="en-US" sz="1250" dirty="0"/>
-          </a:p>
-          <a:p>
-            <a:pPr marL="177800" indent="-177800">
-              <a:spcAft>
-                <a:spcPts val="600"/>
-              </a:spcAft>
-              <a:buSzPct val="100000"/>
-              <a:buChar char="•"/>
-            </a:pPr>
+              <a:t>Egységes, </a:t>
+            </a:r>
+            <a:r>
+              <a:rPr lang="en-US" sz="1250" dirty="0" err="1">
+                <a:solidFill>
+                  <a:srgbClr val="1E2A30"/>
+                </a:solidFill>
+                <a:latin typeface="Calibri" pitchFamily="34" charset="0"/>
+                <a:ea typeface="Calibri" pitchFamily="34" charset="-122"/>
+                <a:cs typeface="Calibri" pitchFamily="34" charset="-120"/>
+              </a:rPr>
+              <a:t>szabványos</a:t>
+            </a:r>
             <a:r>
               <a:rPr lang="en-US" sz="1250" dirty="0">
                 <a:solidFill>
@@ -12822,7 +13550,18 @@
                 <a:ea typeface="Calibri" pitchFamily="34" charset="-122"/>
                 <a:cs typeface="Calibri" pitchFamily="34" charset="-120"/>
               </a:rPr>
-              <a:t>Titkok a repón kívül</a:t>
+              <a:t> </a:t>
+            </a:r>
+            <a:r>
+              <a:rPr lang="en-US" sz="1250" dirty="0" err="1">
+                <a:solidFill>
+                  <a:srgbClr val="1E2A30"/>
+                </a:solidFill>
+                <a:latin typeface="Calibri" pitchFamily="34" charset="0"/>
+                <a:ea typeface="Calibri" pitchFamily="34" charset="-122"/>
+                <a:cs typeface="Calibri" pitchFamily="34" charset="-120"/>
+              </a:rPr>
+              <a:t>hibaválasz</a:t>
             </a:r>
             <a:endParaRPr lang="en-US" sz="1250" dirty="0"/>
           </a:p>
@@ -12854,6 +13593,13 @@
             <a:prstDash val="solid"/>
           </a:ln>
         </p:spPr>
+        <p:txBody>
+          <a:bodyPr/>
+          <a:lstStyle/>
+          <a:p>
+            <a:endParaRPr lang="hu-HU"/>
+          </a:p>
+        </p:txBody>
       </p:sp>
       <p:sp>
         <p:nvSpPr>
